--- a/AgenticAI/5-Tools-and-Framework-RAG/Langchain-1-basics-AI-Agent-Calculator-Weather/Langchain-2-Setup-Installation-CodeExplanation.pptx
+++ b/AgenticAI/5-Tools-and-Framework-RAG/Langchain-1-basics-AI-Agent-Calculator-Weather/Langchain-2-Setup-Installation-CodeExplanation.pptx
@@ -5,23 +5,21 @@
     <p:sldMasterId id="2147483648" r:id="rId1"/>
   </p:sldMasterIdLst>
   <p:notesMasterIdLst>
-    <p:notesMasterId r:id="rId13"/>
+    <p:notesMasterId r:id="rId11"/>
   </p:notesMasterIdLst>
   <p:handoutMasterIdLst>
-    <p:handoutMasterId r:id="rId14"/>
+    <p:handoutMasterId r:id="rId12"/>
   </p:handoutMasterIdLst>
   <p:sldIdLst>
     <p:sldId id="257" r:id="rId2"/>
     <p:sldId id="276" r:id="rId3"/>
-    <p:sldId id="278" r:id="rId4"/>
-    <p:sldId id="279" r:id="rId5"/>
-    <p:sldId id="280" r:id="rId6"/>
-    <p:sldId id="281" r:id="rId7"/>
-    <p:sldId id="282" r:id="rId8"/>
-    <p:sldId id="283" r:id="rId9"/>
-    <p:sldId id="284" r:id="rId10"/>
-    <p:sldId id="285" r:id="rId11"/>
-    <p:sldId id="275" r:id="rId12"/>
+    <p:sldId id="286" r:id="rId4"/>
+    <p:sldId id="278" r:id="rId5"/>
+    <p:sldId id="279" r:id="rId6"/>
+    <p:sldId id="280" r:id="rId7"/>
+    <p:sldId id="287" r:id="rId8"/>
+    <p:sldId id="285" r:id="rId9"/>
+    <p:sldId id="275" r:id="rId10"/>
   </p:sldIdLst>
   <p:sldSz cx="12192000" cy="6858000"/>
   <p:notesSz cx="6858000" cy="9144000"/>
@@ -225,7 +223,7 @@
           <a:p>
             <a:fld id="{7BAEECA8-D063-486F-AE31-5020270C1449}" type="datetimeFigureOut">
               <a:rPr lang="en-US" smtClean="0"/>
-              <a:t>3/28/2026</a:t>
+              <a:t>9/5/2026</a:t>
             </a:fld>
             <a:endParaRPr lang="en-US"/>
           </a:p>
@@ -402,7 +400,7 @@
           <a:p>
             <a:fld id="{CB233BD1-3BA8-448D-9D08-7846095EA517}" type="datetimeFigureOut">
               <a:rPr lang="en-US" smtClean="0"/>
-              <a:t>3/28/2026</a:t>
+              <a:t>9/5/2026</a:t>
             </a:fld>
             <a:endParaRPr lang="en-US"/>
           </a:p>
@@ -816,7 +814,7 @@
           <a:p>
             <a:fld id="{6383FAE1-13DE-4511-8C1B-C8AFB720664C}" type="datetimeFigureOut">
               <a:rPr lang="en-US" smtClean="0"/>
-              <a:t>3/28/2026</a:t>
+              <a:t>9/5/2026</a:t>
             </a:fld>
             <a:endParaRPr lang="en-US"/>
           </a:p>
@@ -1014,7 +1012,7 @@
           <a:p>
             <a:fld id="{6383FAE1-13DE-4511-8C1B-C8AFB720664C}" type="datetimeFigureOut">
               <a:rPr lang="en-US" smtClean="0"/>
-              <a:t>3/28/2026</a:t>
+              <a:t>9/5/2026</a:t>
             </a:fld>
             <a:endParaRPr lang="en-US"/>
           </a:p>
@@ -1222,7 +1220,7 @@
           <a:p>
             <a:fld id="{6383FAE1-13DE-4511-8C1B-C8AFB720664C}" type="datetimeFigureOut">
               <a:rPr lang="en-US" smtClean="0"/>
-              <a:t>3/28/2026</a:t>
+              <a:t>9/5/2026</a:t>
             </a:fld>
             <a:endParaRPr lang="en-US"/>
           </a:p>
@@ -1420,7 +1418,7 @@
           <a:p>
             <a:fld id="{6383FAE1-13DE-4511-8C1B-C8AFB720664C}" type="datetimeFigureOut">
               <a:rPr lang="en-US" smtClean="0"/>
-              <a:t>3/28/2026</a:t>
+              <a:t>9/5/2026</a:t>
             </a:fld>
             <a:endParaRPr lang="en-US"/>
           </a:p>
@@ -1695,7 +1693,7 @@
           <a:p>
             <a:fld id="{6383FAE1-13DE-4511-8C1B-C8AFB720664C}" type="datetimeFigureOut">
               <a:rPr lang="en-US" smtClean="0"/>
-              <a:t>3/28/2026</a:t>
+              <a:t>9/5/2026</a:t>
             </a:fld>
             <a:endParaRPr lang="en-US"/>
           </a:p>
@@ -1960,7 +1958,7 @@
           <a:p>
             <a:fld id="{6383FAE1-13DE-4511-8C1B-C8AFB720664C}" type="datetimeFigureOut">
               <a:rPr lang="en-US" smtClean="0"/>
-              <a:t>3/28/2026</a:t>
+              <a:t>9/5/2026</a:t>
             </a:fld>
             <a:endParaRPr lang="en-US"/>
           </a:p>
@@ -2372,7 +2370,7 @@
           <a:p>
             <a:fld id="{6383FAE1-13DE-4511-8C1B-C8AFB720664C}" type="datetimeFigureOut">
               <a:rPr lang="en-US" smtClean="0"/>
-              <a:t>3/28/2026</a:t>
+              <a:t>9/5/2026</a:t>
             </a:fld>
             <a:endParaRPr lang="en-US"/>
           </a:p>
@@ -2513,7 +2511,7 @@
           <a:p>
             <a:fld id="{6383FAE1-13DE-4511-8C1B-C8AFB720664C}" type="datetimeFigureOut">
               <a:rPr lang="en-US" smtClean="0"/>
-              <a:t>3/28/2026</a:t>
+              <a:t>9/5/2026</a:t>
             </a:fld>
             <a:endParaRPr lang="en-US"/>
           </a:p>
@@ -2626,7 +2624,7 @@
           <a:p>
             <a:fld id="{6383FAE1-13DE-4511-8C1B-C8AFB720664C}" type="datetimeFigureOut">
               <a:rPr lang="en-US" smtClean="0"/>
-              <a:t>3/28/2026</a:t>
+              <a:t>9/5/2026</a:t>
             </a:fld>
             <a:endParaRPr lang="en-US"/>
           </a:p>
@@ -2937,7 +2935,7 @@
           <a:p>
             <a:fld id="{6383FAE1-13DE-4511-8C1B-C8AFB720664C}" type="datetimeFigureOut">
               <a:rPr lang="en-US" smtClean="0"/>
-              <a:t>3/28/2026</a:t>
+              <a:t>9/5/2026</a:t>
             </a:fld>
             <a:endParaRPr lang="en-US"/>
           </a:p>
@@ -3228,7 +3226,7 @@
           <a:p>
             <a:fld id="{6383FAE1-13DE-4511-8C1B-C8AFB720664C}" type="datetimeFigureOut">
               <a:rPr lang="en-US" smtClean="0"/>
-              <a:t>3/28/2026</a:t>
+              <a:t>9/5/2026</a:t>
             </a:fld>
             <a:endParaRPr lang="en-US"/>
           </a:p>
@@ -3472,7 +3470,7 @@
           <a:p>
             <a:fld id="{6383FAE1-13DE-4511-8C1B-C8AFB720664C}" type="datetimeFigureOut">
               <a:rPr lang="en-US" smtClean="0"/>
-              <a:t>3/28/2026</a:t>
+              <a:t>9/5/2026</a:t>
             </a:fld>
             <a:endParaRPr lang="en-US"/>
           </a:p>
@@ -4137,652 +4135,6 @@
 </p:sld>
 </file>
 
-<file path=ppt/slides/slide10.xml><?xml version="1.0" encoding="utf-8"?>
-<p:sld xmlns:a="http://schemas.openxmlformats.org/drawingml/2006/main" xmlns:r="http://schemas.openxmlformats.org/officeDocument/2006/relationships" xmlns:p="http://schemas.openxmlformats.org/presentationml/2006/main">
-  <p:cSld>
-    <p:spTree>
-      <p:nvGrpSpPr>
-        <p:cNvPr id="1" name="">
-          <a:extLst>
-            <a:ext uri="{FF2B5EF4-FFF2-40B4-BE49-F238E27FC236}">
-              <a16:creationId xmlns:a16="http://schemas.microsoft.com/office/drawing/2014/main" id="{F25673E9-841C-1E2C-F7B9-1F27718AFE8C}"/>
-            </a:ext>
-          </a:extLst>
-        </p:cNvPr>
-        <p:cNvGrpSpPr/>
-        <p:nvPr/>
-      </p:nvGrpSpPr>
-      <p:grpSpPr>
-        <a:xfrm>
-          <a:off x="0" y="0"/>
-          <a:ext cx="0" cy="0"/>
-          <a:chOff x="0" y="0"/>
-          <a:chExt cx="0" cy="0"/>
-        </a:xfrm>
-      </p:grpSpPr>
-      <p:sp>
-        <p:nvSpPr>
-          <p:cNvPr id="5" name="TextBox 4">
-            <a:extLst>
-              <a:ext uri="{FF2B5EF4-FFF2-40B4-BE49-F238E27FC236}">
-                <a16:creationId xmlns:a16="http://schemas.microsoft.com/office/drawing/2014/main" id="{CD27D2BC-98ED-4BDD-EEAC-18E42CB67E8C}"/>
-              </a:ext>
-            </a:extLst>
-          </p:cNvPr>
-          <p:cNvSpPr txBox="1"/>
-          <p:nvPr/>
-        </p:nvSpPr>
-        <p:spPr>
-          <a:xfrm>
-            <a:off x="221488" y="43656"/>
-            <a:ext cx="7788656" cy="4524315"/>
-          </a:xfrm>
-          <a:prstGeom prst="rect">
-            <a:avLst/>
-          </a:prstGeom>
-          <a:noFill/>
-        </p:spPr>
-        <p:txBody>
-          <a:bodyPr wrap="square">
-            <a:spAutoFit/>
-          </a:bodyPr>
-          <a:lstStyle/>
-          <a:p>
-            <a:r>
-              <a:rPr lang="en-US" sz="2400" b="1" dirty="0">
-                <a:solidFill>
-                  <a:schemeClr val="accent6">
-                    <a:lumMod val="60000"/>
-                    <a:lumOff val="40000"/>
-                  </a:schemeClr>
-                </a:solidFill>
-              </a:rPr>
-              <a:t>Now we put this in </a:t>
-            </a:r>
-            <a:r>
-              <a:rPr lang="en-US" sz="2400" b="1" dirty="0" err="1">
-                <a:solidFill>
-                  <a:schemeClr val="accent6">
-                    <a:lumMod val="60000"/>
-                    <a:lumOff val="40000"/>
-                  </a:schemeClr>
-                </a:solidFill>
-              </a:rPr>
-              <a:t>streamlit</a:t>
-            </a:r>
-            <a:endParaRPr lang="en-US" sz="2400" b="1" dirty="0">
-              <a:solidFill>
-                <a:schemeClr val="accent6">
-                  <a:lumMod val="60000"/>
-                  <a:lumOff val="40000"/>
-                </a:schemeClr>
-              </a:solidFill>
-            </a:endParaRPr>
-          </a:p>
-          <a:p>
-            <a:pPr marL="457200" indent="-457200">
-              <a:buAutoNum type="arabicParenR"/>
-            </a:pPr>
-            <a:r>
-              <a:rPr lang="en-US" sz="2400" b="1" dirty="0">
-                <a:solidFill>
-                  <a:schemeClr val="accent6">
-                    <a:lumMod val="60000"/>
-                    <a:lumOff val="40000"/>
-                  </a:schemeClr>
-                </a:solidFill>
-              </a:rPr>
-              <a:t>Install </a:t>
-            </a:r>
-            <a:r>
-              <a:rPr lang="en-US" sz="2400" b="1" dirty="0" err="1">
-                <a:solidFill>
-                  <a:schemeClr val="accent6">
-                    <a:lumMod val="60000"/>
-                    <a:lumOff val="40000"/>
-                  </a:schemeClr>
-                </a:solidFill>
-              </a:rPr>
-              <a:t>streamlit</a:t>
-            </a:r>
-            <a:r>
-              <a:rPr lang="en-US" sz="2400" b="1" dirty="0">
-                <a:solidFill>
-                  <a:schemeClr val="accent6">
-                    <a:lumMod val="60000"/>
-                    <a:lumOff val="40000"/>
-                  </a:schemeClr>
-                </a:solidFill>
-              </a:rPr>
-              <a:t>: </a:t>
-            </a:r>
-            <a:r>
-              <a:rPr lang="en-US" sz="2400" dirty="0">
-                <a:solidFill>
-                  <a:schemeClr val="accent6">
-                    <a:lumMod val="60000"/>
-                    <a:lumOff val="40000"/>
-                  </a:schemeClr>
-                </a:solidFill>
-              </a:rPr>
-              <a:t> python -m pip install </a:t>
-            </a:r>
-            <a:r>
-              <a:rPr lang="en-US" sz="2400" dirty="0" err="1">
-                <a:solidFill>
-                  <a:schemeClr val="accent6">
-                    <a:lumMod val="60000"/>
-                    <a:lumOff val="40000"/>
-                  </a:schemeClr>
-                </a:solidFill>
-              </a:rPr>
-              <a:t>streamlit</a:t>
-            </a:r>
-            <a:endParaRPr lang="en-US" sz="2400" dirty="0">
-              <a:solidFill>
-                <a:schemeClr val="accent6">
-                  <a:lumMod val="60000"/>
-                  <a:lumOff val="40000"/>
-                </a:schemeClr>
-              </a:solidFill>
-            </a:endParaRPr>
-          </a:p>
-          <a:p>
-            <a:endParaRPr lang="en-US" sz="2400" dirty="0">
-              <a:solidFill>
-                <a:schemeClr val="accent6">
-                  <a:lumMod val="60000"/>
-                  <a:lumOff val="40000"/>
-                </a:schemeClr>
-              </a:solidFill>
-            </a:endParaRPr>
-          </a:p>
-          <a:p>
-            <a:endParaRPr lang="en-US" sz="2400" dirty="0">
-              <a:solidFill>
-                <a:schemeClr val="accent6">
-                  <a:lumMod val="60000"/>
-                  <a:lumOff val="40000"/>
-                </a:schemeClr>
-              </a:solidFill>
-            </a:endParaRPr>
-          </a:p>
-          <a:p>
-            <a:endParaRPr lang="en-US" sz="2400" dirty="0">
-              <a:solidFill>
-                <a:schemeClr val="accent6">
-                  <a:lumMod val="60000"/>
-                  <a:lumOff val="40000"/>
-                </a:schemeClr>
-              </a:solidFill>
-            </a:endParaRPr>
-          </a:p>
-          <a:p>
-            <a:r>
-              <a:rPr lang="en-US" sz="2400" dirty="0">
-                <a:solidFill>
-                  <a:schemeClr val="accent6">
-                    <a:lumMod val="60000"/>
-                    <a:lumOff val="40000"/>
-                  </a:schemeClr>
-                </a:solidFill>
-              </a:rPr>
-              <a:t>2) Create file </a:t>
-            </a:r>
-          </a:p>
-          <a:p>
-            <a:r>
-              <a:rPr lang="en-US" sz="2400" dirty="0">
-                <a:solidFill>
-                  <a:schemeClr val="accent6">
-                    <a:lumMod val="60000"/>
-                    <a:lumOff val="40000"/>
-                  </a:schemeClr>
-                </a:solidFill>
-              </a:rPr>
-              <a:t>step2_agent_logic.py </a:t>
-            </a:r>
-          </a:p>
-          <a:p>
-            <a:r>
-              <a:rPr lang="en-US" sz="2400" dirty="0">
-                <a:solidFill>
-                  <a:schemeClr val="accent6">
-                    <a:lumMod val="60000"/>
-                    <a:lumOff val="40000"/>
-                  </a:schemeClr>
-                </a:solidFill>
-              </a:rPr>
-              <a:t>and put the code in  there</a:t>
-            </a:r>
-          </a:p>
-          <a:p>
-            <a:endParaRPr lang="en-US" sz="2400" dirty="0">
-              <a:solidFill>
-                <a:schemeClr val="accent6">
-                  <a:lumMod val="60000"/>
-                  <a:lumOff val="40000"/>
-                </a:schemeClr>
-              </a:solidFill>
-            </a:endParaRPr>
-          </a:p>
-          <a:p>
-            <a:endParaRPr lang="en-US" sz="2400" dirty="0">
-              <a:solidFill>
-                <a:schemeClr val="accent6">
-                  <a:lumMod val="60000"/>
-                  <a:lumOff val="40000"/>
-                </a:schemeClr>
-              </a:solidFill>
-            </a:endParaRPr>
-          </a:p>
-          <a:p>
-            <a:r>
-              <a:rPr lang="en-US" sz="2400" dirty="0">
-                <a:solidFill>
-                  <a:schemeClr val="accent6">
-                    <a:lumMod val="60000"/>
-                    <a:lumOff val="40000"/>
-                  </a:schemeClr>
-                </a:solidFill>
-              </a:rPr>
-              <a:t>3) Create app.py </a:t>
-            </a:r>
-          </a:p>
-          <a:p>
-            <a:endParaRPr lang="en-US" sz="2400" dirty="0">
-              <a:solidFill>
-                <a:schemeClr val="accent6">
-                  <a:lumMod val="60000"/>
-                  <a:lumOff val="40000"/>
-                </a:schemeClr>
-              </a:solidFill>
-            </a:endParaRPr>
-          </a:p>
-        </p:txBody>
-      </p:sp>
-      <p:pic>
-        <p:nvPicPr>
-          <p:cNvPr id="3" name="Picture 2">
-            <a:extLst>
-              <a:ext uri="{FF2B5EF4-FFF2-40B4-BE49-F238E27FC236}">
-                <a16:creationId xmlns:a16="http://schemas.microsoft.com/office/drawing/2014/main" id="{86EB1BD4-2705-A1B4-F4A3-B96925B13402}"/>
-              </a:ext>
-            </a:extLst>
-          </p:cNvPr>
-          <p:cNvPicPr>
-            <a:picLocks noChangeAspect="1"/>
-          </p:cNvPicPr>
-          <p:nvPr/>
-        </p:nvPicPr>
-        <p:blipFill>
-          <a:blip r:embed="rId2">
-            <a:extLst>
-              <a:ext uri="{28A0092B-C50C-407E-A947-70E740481C1C}">
-                <a14:useLocalDpi xmlns:a14="http://schemas.microsoft.com/office/drawing/2010/main" val="0"/>
-              </a:ext>
-            </a:extLst>
-          </a:blip>
-          <a:stretch>
-            <a:fillRect/>
-          </a:stretch>
-        </p:blipFill>
-        <p:spPr>
-          <a:xfrm>
-            <a:off x="4197097" y="914380"/>
-            <a:ext cx="7994904" cy="4761587"/>
-          </a:xfrm>
-          <a:prstGeom prst="rect">
-            <a:avLst/>
-          </a:prstGeom>
-        </p:spPr>
-      </p:pic>
-      <p:sp>
-        <p:nvSpPr>
-          <p:cNvPr id="8" name="TextBox 7">
-            <a:extLst>
-              <a:ext uri="{FF2B5EF4-FFF2-40B4-BE49-F238E27FC236}">
-                <a16:creationId xmlns:a16="http://schemas.microsoft.com/office/drawing/2014/main" id="{6234C675-4CB1-C112-240C-32A9AB63B61E}"/>
-              </a:ext>
-            </a:extLst>
-          </p:cNvPr>
-          <p:cNvSpPr txBox="1"/>
-          <p:nvPr/>
-        </p:nvSpPr>
-        <p:spPr>
-          <a:xfrm>
-            <a:off x="224028" y="4869841"/>
-            <a:ext cx="5664708" cy="1938992"/>
-          </a:xfrm>
-          <a:prstGeom prst="rect">
-            <a:avLst/>
-          </a:prstGeom>
-          <a:noFill/>
-        </p:spPr>
-        <p:txBody>
-          <a:bodyPr wrap="square">
-            <a:spAutoFit/>
-          </a:bodyPr>
-          <a:lstStyle/>
-          <a:p>
-            <a:r>
-              <a:rPr lang="en-US" sz="2400" dirty="0">
-                <a:solidFill>
-                  <a:schemeClr val="accent6">
-                    <a:lumMod val="60000"/>
-                    <a:lumOff val="40000"/>
-                  </a:schemeClr>
-                </a:solidFill>
-              </a:rPr>
-              <a:t>4) Goto same </a:t>
-            </a:r>
-            <a:r>
-              <a:rPr lang="en-US" sz="2400" dirty="0" err="1">
-                <a:solidFill>
-                  <a:schemeClr val="accent6">
-                    <a:lumMod val="60000"/>
-                    <a:lumOff val="40000"/>
-                  </a:schemeClr>
-                </a:solidFill>
-              </a:rPr>
-              <a:t>dir</a:t>
-            </a:r>
-            <a:r>
-              <a:rPr lang="en-US" sz="2400" dirty="0">
-                <a:solidFill>
-                  <a:schemeClr val="accent6">
-                    <a:lumMod val="60000"/>
-                    <a:lumOff val="40000"/>
-                  </a:schemeClr>
-                </a:solidFill>
-              </a:rPr>
-              <a:t> that contains</a:t>
-            </a:r>
-          </a:p>
-          <a:p>
-            <a:r>
-              <a:rPr lang="en-US" sz="2400" dirty="0">
-                <a:solidFill>
-                  <a:schemeClr val="accent6">
-                    <a:lumMod val="60000"/>
-                    <a:lumOff val="40000"/>
-                  </a:schemeClr>
-                </a:solidFill>
-              </a:rPr>
-              <a:t>app.py and Run </a:t>
-            </a:r>
-          </a:p>
-          <a:p>
-            <a:r>
-              <a:rPr lang="en-US" sz="2400" dirty="0">
-                <a:solidFill>
-                  <a:schemeClr val="accent6">
-                    <a:lumMod val="60000"/>
-                    <a:lumOff val="40000"/>
-                  </a:schemeClr>
-                </a:solidFill>
-              </a:rPr>
-              <a:t>&gt; python -m </a:t>
-            </a:r>
-            <a:r>
-              <a:rPr lang="en-US" sz="2400" dirty="0" err="1">
-                <a:solidFill>
-                  <a:schemeClr val="accent6">
-                    <a:lumMod val="60000"/>
-                    <a:lumOff val="40000"/>
-                  </a:schemeClr>
-                </a:solidFill>
-              </a:rPr>
-              <a:t>streamlit</a:t>
-            </a:r>
-            <a:r>
-              <a:rPr lang="en-US" sz="2400" dirty="0">
-                <a:solidFill>
-                  <a:schemeClr val="accent6">
-                    <a:lumMod val="60000"/>
-                    <a:lumOff val="40000"/>
-                  </a:schemeClr>
-                </a:solidFill>
-              </a:rPr>
-              <a:t> run app.py</a:t>
-            </a:r>
-          </a:p>
-          <a:p>
-            <a:endParaRPr lang="en-US" sz="2400" dirty="0">
-              <a:solidFill>
-                <a:schemeClr val="accent6">
-                  <a:lumMod val="60000"/>
-                  <a:lumOff val="40000"/>
-                </a:schemeClr>
-              </a:solidFill>
-            </a:endParaRPr>
-          </a:p>
-          <a:p>
-            <a:r>
-              <a:rPr lang="en-US" sz="2400" dirty="0">
-                <a:solidFill>
-                  <a:schemeClr val="accent6">
-                    <a:lumMod val="60000"/>
-                    <a:lumOff val="40000"/>
-                  </a:schemeClr>
-                </a:solidFill>
-              </a:rPr>
-              <a:t>(See the screenshot of the output)</a:t>
-            </a:r>
-          </a:p>
-        </p:txBody>
-      </p:sp>
-    </p:spTree>
-    <p:extLst>
-      <p:ext uri="{BB962C8B-B14F-4D97-AF65-F5344CB8AC3E}">
-        <p14:creationId xmlns:p14="http://schemas.microsoft.com/office/powerpoint/2010/main" val="2590755268"/>
-      </p:ext>
-    </p:extLst>
-  </p:cSld>
-  <p:clrMapOvr>
-    <a:masterClrMapping/>
-  </p:clrMapOvr>
-</p:sld>
-</file>
-
-<file path=ppt/slides/slide11.xml><?xml version="1.0" encoding="utf-8"?>
-<p:sld xmlns:a="http://schemas.openxmlformats.org/drawingml/2006/main" xmlns:r="http://schemas.openxmlformats.org/officeDocument/2006/relationships" xmlns:p="http://schemas.openxmlformats.org/presentationml/2006/main">
-  <p:cSld>
-    <p:spTree>
-      <p:nvGrpSpPr>
-        <p:cNvPr id="1" name="">
-          <a:extLst>
-            <a:ext uri="{FF2B5EF4-FFF2-40B4-BE49-F238E27FC236}">
-              <a16:creationId xmlns:a16="http://schemas.microsoft.com/office/drawing/2014/main" id="{DD931D7F-4279-DA2E-FA64-6CF3C441D414}"/>
-            </a:ext>
-          </a:extLst>
-        </p:cNvPr>
-        <p:cNvGrpSpPr/>
-        <p:nvPr/>
-      </p:nvGrpSpPr>
-      <p:grpSpPr>
-        <a:xfrm>
-          <a:off x="0" y="0"/>
-          <a:ext cx="0" cy="0"/>
-          <a:chOff x="0" y="0"/>
-          <a:chExt cx="0" cy="0"/>
-        </a:xfrm>
-      </p:grpSpPr>
-      <p:sp>
-        <p:nvSpPr>
-          <p:cNvPr id="2" name="Title 1">
-            <a:extLst>
-              <a:ext uri="{FF2B5EF4-FFF2-40B4-BE49-F238E27FC236}">
-                <a16:creationId xmlns:a16="http://schemas.microsoft.com/office/drawing/2014/main" id="{795E1B75-886E-0812-B2FD-DD250C225521}"/>
-              </a:ext>
-            </a:extLst>
-          </p:cNvPr>
-          <p:cNvSpPr>
-            <a:spLocks noGrp="1"/>
-          </p:cNvSpPr>
-          <p:nvPr>
-            <p:ph type="title"/>
-          </p:nvPr>
-        </p:nvSpPr>
-        <p:spPr>
-          <a:xfrm>
-            <a:off x="274320" y="136525"/>
-            <a:ext cx="11466576" cy="832739"/>
-          </a:xfrm>
-        </p:spPr>
-        <p:txBody>
-          <a:bodyPr>
-            <a:normAutofit/>
-          </a:bodyPr>
-          <a:lstStyle/>
-          <a:p>
-            <a:r>
-              <a:rPr lang="en-US" sz="3600" dirty="0"/>
-              <a:t>EXTRA</a:t>
-            </a:r>
-          </a:p>
-        </p:txBody>
-      </p:sp>
-      <p:sp>
-        <p:nvSpPr>
-          <p:cNvPr id="4" name="TextBox 3">
-            <a:extLst>
-              <a:ext uri="{FF2B5EF4-FFF2-40B4-BE49-F238E27FC236}">
-                <a16:creationId xmlns:a16="http://schemas.microsoft.com/office/drawing/2014/main" id="{902F8BE4-9CEA-0DAD-0357-E0A8215F169D}"/>
-              </a:ext>
-            </a:extLst>
-          </p:cNvPr>
-          <p:cNvSpPr txBox="1"/>
-          <p:nvPr/>
-        </p:nvSpPr>
-        <p:spPr>
-          <a:xfrm>
-            <a:off x="274320" y="933117"/>
-            <a:ext cx="11658600" cy="1477328"/>
-          </a:xfrm>
-          <a:prstGeom prst="rect">
-            <a:avLst/>
-          </a:prstGeom>
-          <a:noFill/>
-        </p:spPr>
-        <p:txBody>
-          <a:bodyPr wrap="square">
-            <a:spAutoFit/>
-          </a:bodyPr>
-          <a:lstStyle/>
-          <a:p>
-            <a:pPr marL="0" indent="0">
-              <a:buNone/>
-            </a:pPr>
-            <a:r>
-              <a:rPr lang="en-US" dirty="0" err="1">
-                <a:solidFill>
-                  <a:schemeClr val="accent6">
-                    <a:lumMod val="60000"/>
-                    <a:lumOff val="40000"/>
-                  </a:schemeClr>
-                </a:solidFill>
-              </a:rPr>
-              <a:t>Ffnbksdfd</a:t>
-            </a:r>
-            <a:endParaRPr lang="en-US" dirty="0">
-              <a:solidFill>
-                <a:schemeClr val="accent6">
-                  <a:lumMod val="60000"/>
-                  <a:lumOff val="40000"/>
-                </a:schemeClr>
-              </a:solidFill>
-            </a:endParaRPr>
-          </a:p>
-          <a:p>
-            <a:pPr marL="0" indent="0">
-              <a:buNone/>
-            </a:pPr>
-            <a:r>
-              <a:rPr lang="en-US" dirty="0" err="1">
-                <a:solidFill>
-                  <a:schemeClr val="accent6">
-                    <a:lumMod val="60000"/>
-                    <a:lumOff val="40000"/>
-                  </a:schemeClr>
-                </a:solidFill>
-              </a:rPr>
-              <a:t>Fdslj;f</a:t>
-            </a:r>
-            <a:endParaRPr lang="en-US" dirty="0">
-              <a:solidFill>
-                <a:schemeClr val="accent6">
-                  <a:lumMod val="60000"/>
-                  <a:lumOff val="40000"/>
-                </a:schemeClr>
-              </a:solidFill>
-            </a:endParaRPr>
-          </a:p>
-          <a:p>
-            <a:pPr marL="0" indent="0">
-              <a:buNone/>
-            </a:pPr>
-            <a:endParaRPr lang="en-US" dirty="0">
-              <a:solidFill>
-                <a:schemeClr val="accent6">
-                  <a:lumMod val="60000"/>
-                  <a:lumOff val="40000"/>
-                </a:schemeClr>
-              </a:solidFill>
-            </a:endParaRPr>
-          </a:p>
-          <a:p>
-            <a:pPr marL="0" indent="0">
-              <a:buNone/>
-            </a:pPr>
-            <a:r>
-              <a:rPr lang="en-US" dirty="0" err="1">
-                <a:solidFill>
-                  <a:schemeClr val="accent6">
-                    <a:lumMod val="60000"/>
-                    <a:lumOff val="40000"/>
-                  </a:schemeClr>
-                </a:solidFill>
-              </a:rPr>
-              <a:t>Fl;ds</a:t>
-            </a:r>
-            <a:endParaRPr lang="en-US" dirty="0">
-              <a:solidFill>
-                <a:schemeClr val="accent6">
-                  <a:lumMod val="60000"/>
-                  <a:lumOff val="40000"/>
-                </a:schemeClr>
-              </a:solidFill>
-            </a:endParaRPr>
-          </a:p>
-          <a:p>
-            <a:pPr marL="0" indent="0">
-              <a:buNone/>
-            </a:pPr>
-            <a:endParaRPr lang="en-US" dirty="0">
-              <a:solidFill>
-                <a:schemeClr val="accent6">
-                  <a:lumMod val="60000"/>
-                  <a:lumOff val="40000"/>
-                </a:schemeClr>
-              </a:solidFill>
-            </a:endParaRPr>
-          </a:p>
-        </p:txBody>
-      </p:sp>
-    </p:spTree>
-    <p:extLst>
-      <p:ext uri="{BB962C8B-B14F-4D97-AF65-F5344CB8AC3E}">
-        <p14:creationId xmlns:p14="http://schemas.microsoft.com/office/powerpoint/2010/main" val="366625378"/>
-      </p:ext>
-    </p:extLst>
-  </p:cSld>
-  <p:clrMapOvr>
-    <a:masterClrMapping/>
-  </p:clrMapOvr>
-</p:sld>
-</file>
-
 <file path=ppt/slides/slide2.xml><?xml version="1.0" encoding="utf-8"?>
 <p:sld xmlns:a="http://schemas.openxmlformats.org/drawingml/2006/main" xmlns:r="http://schemas.openxmlformats.org/officeDocument/2006/relationships" xmlns:p="http://schemas.openxmlformats.org/presentationml/2006/main">
   <p:cSld>
@@ -4808,316 +4160,234 @@
       </p:grpSpPr>
       <p:sp>
         <p:nvSpPr>
-          <p:cNvPr id="9" name="TextBox 8">
-            <a:extLst>
-              <a:ext uri="{FF2B5EF4-FFF2-40B4-BE49-F238E27FC236}">
-                <a16:creationId xmlns:a16="http://schemas.microsoft.com/office/drawing/2014/main" id="{E018E7A2-ACBA-1394-8855-0E8750AA2C1F}"/>
-              </a:ext>
-            </a:extLst>
-          </p:cNvPr>
-          <p:cNvSpPr txBox="1"/>
+          <p:cNvPr id="2" name="Rectangle 1">
+            <a:extLst>
+              <a:ext uri="{FF2B5EF4-FFF2-40B4-BE49-F238E27FC236}">
+                <a16:creationId xmlns:a16="http://schemas.microsoft.com/office/drawing/2014/main" id="{546D00F0-9A66-1260-BD79-ADBAA37EB1C2}"/>
+              </a:ext>
+            </a:extLst>
+          </p:cNvPr>
+          <p:cNvSpPr/>
           <p:nvPr/>
         </p:nvSpPr>
         <p:spPr>
           <a:xfrm>
-            <a:off x="246888" y="226536"/>
-            <a:ext cx="11631168" cy="5262979"/>
+            <a:off x="1975104" y="1088136"/>
+            <a:ext cx="7772400" cy="3273552"/>
           </a:xfrm>
           <a:prstGeom prst="rect">
             <a:avLst/>
           </a:prstGeom>
-          <a:noFill/>
         </p:spPr>
-        <p:txBody>
-          <a:bodyPr wrap="square">
-            <a:spAutoFit/>
-          </a:bodyPr>
+        <p:style>
+          <a:lnRef idx="2">
+            <a:schemeClr val="accent1">
+              <a:shade val="15000"/>
+            </a:schemeClr>
+          </a:lnRef>
+          <a:fillRef idx="1">
+            <a:schemeClr val="accent1"/>
+          </a:fillRef>
+          <a:effectRef idx="0">
+            <a:schemeClr val="accent1"/>
+          </a:effectRef>
+          <a:fontRef idx="minor">
+            <a:schemeClr val="lt1"/>
+          </a:fontRef>
+        </p:style>
+        <p:txBody>
+          <a:bodyPr rtlCol="0" anchor="ctr"/>
           <a:lstStyle/>
           <a:p>
-            <a:r>
-              <a:rPr lang="en-US" sz="2400" b="1" dirty="0">
-                <a:solidFill>
-                  <a:schemeClr val="accent6">
-                    <a:lumMod val="60000"/>
-                    <a:lumOff val="40000"/>
-                  </a:schemeClr>
-                </a:solidFill>
-              </a:rPr>
-              <a:t># STEPS</a:t>
-            </a:r>
-            <a:endParaRPr lang="en-US" sz="2400" dirty="0">
-              <a:solidFill>
-                <a:schemeClr val="accent6">
-                  <a:lumMod val="60000"/>
-                  <a:lumOff val="40000"/>
-                </a:schemeClr>
-              </a:solidFill>
-            </a:endParaRPr>
-          </a:p>
-          <a:p>
-            <a:endParaRPr lang="en-US" sz="2400" dirty="0">
-              <a:solidFill>
-                <a:schemeClr val="accent6">
-                  <a:lumMod val="60000"/>
-                  <a:lumOff val="40000"/>
-                </a:schemeClr>
-              </a:solidFill>
-            </a:endParaRPr>
-          </a:p>
-          <a:p>
-            <a:r>
-              <a:rPr lang="en-US" sz="2400" b="1" dirty="0">
-                <a:solidFill>
-                  <a:schemeClr val="accent6">
-                    <a:lumMod val="60000"/>
-                    <a:lumOff val="40000"/>
-                  </a:schemeClr>
-                </a:solidFill>
-              </a:rPr>
-              <a:t>## Work with python3.10. Do not work with higher version.</a:t>
-            </a:r>
-            <a:endParaRPr lang="en-US" sz="2400" dirty="0">
-              <a:solidFill>
-                <a:schemeClr val="accent6">
-                  <a:lumMod val="60000"/>
-                  <a:lumOff val="40000"/>
-                </a:schemeClr>
-              </a:solidFill>
-            </a:endParaRPr>
-          </a:p>
-          <a:p>
-            <a:br>
-              <a:rPr lang="en-US" sz="2400" dirty="0">
-                <a:solidFill>
-                  <a:schemeClr val="accent6">
-                    <a:lumMod val="60000"/>
-                    <a:lumOff val="40000"/>
-                  </a:schemeClr>
-                </a:solidFill>
-              </a:rPr>
-            </a:br>
-            <a:r>
-              <a:rPr lang="en-US" sz="2400" b="1" dirty="0">
-                <a:solidFill>
-                  <a:schemeClr val="accent6">
-                    <a:lumMod val="60000"/>
-                    <a:lumOff val="40000"/>
-                  </a:schemeClr>
-                </a:solidFill>
-              </a:rPr>
-              <a:t>### 1) Create virtual environment </a:t>
-            </a:r>
-            <a:r>
-              <a:rPr lang="en-US" sz="2400" dirty="0">
-                <a:solidFill>
-                  <a:schemeClr val="accent6">
-                    <a:lumMod val="60000"/>
-                    <a:lumOff val="40000"/>
-                  </a:schemeClr>
-                </a:solidFill>
-              </a:rPr>
-              <a:t>(Took 2 minutes)</a:t>
-            </a:r>
-            <a:r>
-              <a:rPr lang="en-US" sz="2400" b="1" dirty="0">
-                <a:solidFill>
-                  <a:schemeClr val="accent6">
-                    <a:lumMod val="60000"/>
-                    <a:lumOff val="40000"/>
-                  </a:schemeClr>
-                </a:solidFill>
-              </a:rPr>
-              <a:t>:</a:t>
-            </a:r>
-            <a:endParaRPr lang="en-US" sz="2400" dirty="0">
-              <a:solidFill>
-                <a:schemeClr val="accent6">
-                  <a:lumMod val="60000"/>
-                  <a:lumOff val="40000"/>
-                </a:schemeClr>
-              </a:solidFill>
-            </a:endParaRPr>
-          </a:p>
-          <a:p>
-            <a:br>
-              <a:rPr lang="en-US" sz="2400" dirty="0">
-                <a:solidFill>
-                  <a:schemeClr val="accent6">
-                    <a:lumMod val="60000"/>
-                    <a:lumOff val="40000"/>
-                  </a:schemeClr>
-                </a:solidFill>
-              </a:rPr>
-            </a:br>
-            <a:r>
-              <a:rPr lang="en-US" sz="2400" dirty="0">
-                <a:solidFill>
-                  <a:schemeClr val="accent6">
-                    <a:lumMod val="60000"/>
-                    <a:lumOff val="40000"/>
-                  </a:schemeClr>
-                </a:solidFill>
-              </a:rPr>
-              <a:t>&gt; C:\Users\hi\AppData\Local\Programs\Python\Python310\python.exe -m </a:t>
-            </a:r>
-            <a:r>
-              <a:rPr lang="en-US" sz="2400" dirty="0" err="1">
-                <a:solidFill>
-                  <a:schemeClr val="accent6">
-                    <a:lumMod val="60000"/>
-                    <a:lumOff val="40000"/>
-                  </a:schemeClr>
-                </a:solidFill>
-              </a:rPr>
-              <a:t>venv</a:t>
-            </a:r>
-            <a:r>
-              <a:rPr lang="en-US" sz="2400" dirty="0">
-                <a:solidFill>
-                  <a:schemeClr val="accent6">
-                    <a:lumMod val="60000"/>
-                    <a:lumOff val="40000"/>
-                  </a:schemeClr>
-                </a:solidFill>
-              </a:rPr>
-              <a:t> .</a:t>
-            </a:r>
-            <a:r>
-              <a:rPr lang="en-US" sz="2400" dirty="0" err="1">
-                <a:solidFill>
-                  <a:schemeClr val="accent6">
-                    <a:lumMod val="60000"/>
-                    <a:lumOff val="40000"/>
-                  </a:schemeClr>
-                </a:solidFill>
-              </a:rPr>
-              <a:t>venv</a:t>
-            </a:r>
-            <a:endParaRPr lang="en-US" sz="2400" dirty="0">
-              <a:solidFill>
-                <a:schemeClr val="accent6">
-                  <a:lumMod val="60000"/>
-                  <a:lumOff val="40000"/>
-                </a:schemeClr>
-              </a:solidFill>
-            </a:endParaRPr>
-          </a:p>
-          <a:p>
-            <a:endParaRPr lang="en-US" sz="2400" dirty="0">
-              <a:solidFill>
-                <a:schemeClr val="accent6">
-                  <a:lumMod val="60000"/>
-                  <a:lumOff val="40000"/>
-                </a:schemeClr>
-              </a:solidFill>
-            </a:endParaRPr>
-          </a:p>
-          <a:p>
-            <a:endParaRPr lang="en-US" sz="2400" dirty="0">
-              <a:solidFill>
-                <a:schemeClr val="accent6">
-                  <a:lumMod val="60000"/>
-                  <a:lumOff val="40000"/>
-                </a:schemeClr>
-              </a:solidFill>
-            </a:endParaRPr>
-          </a:p>
-          <a:p>
-            <a:r>
-              <a:rPr lang="en-US" sz="2400" b="1" dirty="0">
-                <a:solidFill>
-                  <a:schemeClr val="accent6">
-                    <a:lumMod val="60000"/>
-                    <a:lumOff val="40000"/>
-                  </a:schemeClr>
-                </a:solidFill>
-              </a:rPr>
-              <a:t>### 2) Activate virtual </a:t>
-            </a:r>
-            <a:r>
-              <a:rPr lang="en-US" sz="2400" b="1" dirty="0" err="1">
-                <a:solidFill>
-                  <a:schemeClr val="accent6">
-                    <a:lumMod val="60000"/>
-                    <a:lumOff val="40000"/>
-                  </a:schemeClr>
-                </a:solidFill>
-              </a:rPr>
-              <a:t>envir</a:t>
-            </a:r>
-            <a:endParaRPr lang="en-US" sz="2400" dirty="0">
-              <a:solidFill>
-                <a:schemeClr val="accent6">
-                  <a:lumMod val="60000"/>
-                  <a:lumOff val="40000"/>
-                </a:schemeClr>
-              </a:solidFill>
-            </a:endParaRPr>
-          </a:p>
-          <a:p>
-            <a:endParaRPr lang="en-US" sz="2400" dirty="0">
-              <a:solidFill>
-                <a:schemeClr val="accent6">
-                  <a:lumMod val="60000"/>
-                  <a:lumOff val="40000"/>
-                </a:schemeClr>
-              </a:solidFill>
-            </a:endParaRPr>
-          </a:p>
-          <a:p>
-            <a:r>
-              <a:rPr lang="en-US" sz="2400" dirty="0">
-                <a:solidFill>
-                  <a:schemeClr val="accent6">
-                    <a:lumMod val="60000"/>
-                    <a:lumOff val="40000"/>
-                  </a:schemeClr>
-                </a:solidFill>
-              </a:rPr>
-              <a:t>&gt; .</a:t>
-            </a:r>
-            <a:r>
-              <a:rPr lang="en-US" sz="2400" dirty="0" err="1">
-                <a:solidFill>
-                  <a:schemeClr val="accent6">
-                    <a:lumMod val="60000"/>
-                    <a:lumOff val="40000"/>
-                  </a:schemeClr>
-                </a:solidFill>
-              </a:rPr>
-              <a:t>venv</a:t>
-            </a:r>
-            <a:r>
-              <a:rPr lang="en-US" sz="2400" dirty="0">
-                <a:solidFill>
-                  <a:schemeClr val="accent6">
-                    <a:lumMod val="60000"/>
-                    <a:lumOff val="40000"/>
-                  </a:schemeClr>
-                </a:solidFill>
-              </a:rPr>
-              <a:t>\Scripts\Activate.ps1</a:t>
-            </a:r>
-          </a:p>
-          <a:p>
-            <a:br>
-              <a:rPr lang="en-US" sz="2400" dirty="0">
-                <a:solidFill>
-                  <a:schemeClr val="accent6">
-                    <a:lumMod val="60000"/>
-                    <a:lumOff val="40000"/>
-                  </a:schemeClr>
-                </a:solidFill>
-              </a:rPr>
-            </a:br>
-            <a:endParaRPr lang="en-US" sz="2400" dirty="0">
-              <a:solidFill>
-                <a:schemeClr val="accent6">
-                  <a:lumMod val="60000"/>
-                  <a:lumOff val="40000"/>
-                </a:schemeClr>
-              </a:solidFill>
-            </a:endParaRPr>
+            <a:pPr algn="ctr"/>
+            <a:r>
+              <a:rPr lang="en-US" sz="3200" dirty="0"/>
+              <a:t>Agent</a:t>
+            </a:r>
+          </a:p>
+          <a:p>
+            <a:pPr algn="ctr"/>
+            <a:endParaRPr lang="en-US" sz="3200" dirty="0"/>
+          </a:p>
+          <a:p>
+            <a:pPr algn="ctr"/>
+            <a:endParaRPr lang="en-US" sz="3200" dirty="0"/>
+          </a:p>
+          <a:p>
+            <a:pPr algn="ctr"/>
+            <a:endParaRPr lang="en-US" sz="3200" dirty="0"/>
+          </a:p>
+          <a:p>
+            <a:pPr algn="ctr"/>
+            <a:endParaRPr lang="en-US" sz="3200" dirty="0"/>
+          </a:p>
+          <a:p>
+            <a:pPr algn="ctr"/>
+            <a:endParaRPr lang="en-US" sz="3200" dirty="0"/>
+          </a:p>
+        </p:txBody>
+      </p:sp>
+      <p:sp>
+        <p:nvSpPr>
+          <p:cNvPr id="3" name="Oval 2">
+            <a:extLst>
+              <a:ext uri="{FF2B5EF4-FFF2-40B4-BE49-F238E27FC236}">
+                <a16:creationId xmlns:a16="http://schemas.microsoft.com/office/drawing/2014/main" id="{57F2A4AD-4A38-79B9-67FC-E209ACBBD284}"/>
+              </a:ext>
+            </a:extLst>
+          </p:cNvPr>
+          <p:cNvSpPr/>
+          <p:nvPr/>
+        </p:nvSpPr>
+        <p:spPr>
+          <a:xfrm>
+            <a:off x="7703820" y="2276856"/>
+            <a:ext cx="1527048" cy="1307592"/>
+          </a:xfrm>
+          <a:prstGeom prst="ellipse">
+            <a:avLst/>
+          </a:prstGeom>
+        </p:spPr>
+        <p:style>
+          <a:lnRef idx="1">
+            <a:schemeClr val="accent3"/>
+          </a:lnRef>
+          <a:fillRef idx="2">
+            <a:schemeClr val="accent3"/>
+          </a:fillRef>
+          <a:effectRef idx="1">
+            <a:schemeClr val="accent3"/>
+          </a:effectRef>
+          <a:fontRef idx="minor">
+            <a:schemeClr val="dk1"/>
+          </a:fontRef>
+        </p:style>
+        <p:txBody>
+          <a:bodyPr rtlCol="0" anchor="ctr"/>
+          <a:lstStyle/>
+          <a:p>
+            <a:pPr algn="ctr"/>
+            <a:r>
+              <a:rPr lang="en-US" dirty="0"/>
+              <a:t>Memory</a:t>
+            </a:r>
+            <a:endParaRPr lang="en-IN" dirty="0"/>
+          </a:p>
+        </p:txBody>
+      </p:sp>
+      <p:sp>
+        <p:nvSpPr>
+          <p:cNvPr id="7" name="Oval 6">
+            <a:extLst>
+              <a:ext uri="{FF2B5EF4-FFF2-40B4-BE49-F238E27FC236}">
+                <a16:creationId xmlns:a16="http://schemas.microsoft.com/office/drawing/2014/main" id="{27D33DB4-DA7E-57DA-73F7-6E82929527FF}"/>
+              </a:ext>
+            </a:extLst>
+          </p:cNvPr>
+          <p:cNvSpPr/>
+          <p:nvPr/>
+        </p:nvSpPr>
+        <p:spPr>
+          <a:xfrm>
+            <a:off x="2075688" y="2276856"/>
+            <a:ext cx="1527048" cy="1307592"/>
+          </a:xfrm>
+          <a:prstGeom prst="ellipse">
+            <a:avLst/>
+          </a:prstGeom>
+        </p:spPr>
+        <p:style>
+          <a:lnRef idx="1">
+            <a:schemeClr val="accent3"/>
+          </a:lnRef>
+          <a:fillRef idx="2">
+            <a:schemeClr val="accent3"/>
+          </a:fillRef>
+          <a:effectRef idx="1">
+            <a:schemeClr val="accent3"/>
+          </a:effectRef>
+          <a:fontRef idx="minor">
+            <a:schemeClr val="dk1"/>
+          </a:fontRef>
+        </p:style>
+        <p:txBody>
+          <a:bodyPr rtlCol="0" anchor="ctr"/>
+          <a:lstStyle/>
+          <a:p>
+            <a:pPr algn="ctr"/>
+            <a:r>
+              <a:rPr lang="en-US" dirty="0"/>
+              <a:t>LLM</a:t>
+            </a:r>
+            <a:endParaRPr lang="en-IN" dirty="0"/>
+          </a:p>
+        </p:txBody>
+      </p:sp>
+      <p:sp>
+        <p:nvSpPr>
+          <p:cNvPr id="10" name="Oval 9">
+            <a:extLst>
+              <a:ext uri="{FF2B5EF4-FFF2-40B4-BE49-F238E27FC236}">
+                <a16:creationId xmlns:a16="http://schemas.microsoft.com/office/drawing/2014/main" id="{AA3112D2-7498-8286-DC32-D3280AA779D9}"/>
+              </a:ext>
+            </a:extLst>
+          </p:cNvPr>
+          <p:cNvSpPr/>
+          <p:nvPr/>
+        </p:nvSpPr>
+        <p:spPr>
+          <a:xfrm>
+            <a:off x="4431792" y="2276856"/>
+            <a:ext cx="2554224" cy="1554480"/>
+          </a:xfrm>
+          <a:prstGeom prst="ellipse">
+            <a:avLst/>
+          </a:prstGeom>
+        </p:spPr>
+        <p:style>
+          <a:lnRef idx="1">
+            <a:schemeClr val="accent3"/>
+          </a:lnRef>
+          <a:fillRef idx="2">
+            <a:schemeClr val="accent3"/>
+          </a:fillRef>
+          <a:effectRef idx="1">
+            <a:schemeClr val="accent3"/>
+          </a:effectRef>
+          <a:fontRef idx="minor">
+            <a:schemeClr val="dk1"/>
+          </a:fontRef>
+        </p:style>
+        <p:txBody>
+          <a:bodyPr rtlCol="0" anchor="ctr"/>
+          <a:lstStyle/>
+          <a:p>
+            <a:pPr algn="ctr"/>
+            <a:r>
+              <a:rPr lang="en-US" dirty="0"/>
+              <a:t>Tools</a:t>
+            </a:r>
+          </a:p>
+          <a:p>
+            <a:pPr marL="285750" indent="-285750">
+              <a:buFont typeface="Arial" panose="020B0604020202020204" pitchFamily="34" charset="0"/>
+              <a:buChar char="•"/>
+            </a:pPr>
+            <a:r>
+              <a:rPr lang="en-US" dirty="0"/>
+              <a:t>Weather</a:t>
+            </a:r>
+          </a:p>
+          <a:p>
+            <a:pPr marL="285750" indent="-285750">
+              <a:buFont typeface="Arial" panose="020B0604020202020204" pitchFamily="34" charset="0"/>
+              <a:buChar char="•"/>
+            </a:pPr>
+            <a:r>
+              <a:rPr lang="en-US" dirty="0"/>
+              <a:t>Calculator</a:t>
+            </a:r>
+            <a:endParaRPr lang="en-IN" dirty="0"/>
           </a:p>
         </p:txBody>
       </p:sp>
@@ -5135,6 +4405,336 @@
 </file>
 
 <file path=ppt/slides/slide3.xml><?xml version="1.0" encoding="utf-8"?>
+<p:sld xmlns:a="http://schemas.openxmlformats.org/drawingml/2006/main" xmlns:r="http://schemas.openxmlformats.org/officeDocument/2006/relationships" xmlns:p="http://schemas.openxmlformats.org/presentationml/2006/main">
+  <p:cSld>
+    <p:spTree>
+      <p:nvGrpSpPr>
+        <p:cNvPr id="1" name="">
+          <a:extLst>
+            <a:ext uri="{FF2B5EF4-FFF2-40B4-BE49-F238E27FC236}">
+              <a16:creationId xmlns:a16="http://schemas.microsoft.com/office/drawing/2014/main" id="{D99DDAF8-56B5-0FBF-6294-9256A63296A4}"/>
+            </a:ext>
+          </a:extLst>
+        </p:cNvPr>
+        <p:cNvGrpSpPr/>
+        <p:nvPr/>
+      </p:nvGrpSpPr>
+      <p:grpSpPr>
+        <a:xfrm>
+          <a:off x="0" y="0"/>
+          <a:ext cx="0" cy="0"/>
+          <a:chOff x="0" y="0"/>
+          <a:chExt cx="0" cy="0"/>
+        </a:xfrm>
+      </p:grpSpPr>
+      <p:sp>
+        <p:nvSpPr>
+          <p:cNvPr id="9" name="TextBox 8">
+            <a:extLst>
+              <a:ext uri="{FF2B5EF4-FFF2-40B4-BE49-F238E27FC236}">
+                <a16:creationId xmlns:a16="http://schemas.microsoft.com/office/drawing/2014/main" id="{E3145381-B9A2-A769-8C9F-EFA4F55A89DE}"/>
+              </a:ext>
+            </a:extLst>
+          </p:cNvPr>
+          <p:cNvSpPr txBox="1"/>
+          <p:nvPr/>
+        </p:nvSpPr>
+        <p:spPr>
+          <a:xfrm>
+            <a:off x="246888" y="226536"/>
+            <a:ext cx="11631168" cy="4893647"/>
+          </a:xfrm>
+          <a:prstGeom prst="rect">
+            <a:avLst/>
+          </a:prstGeom>
+          <a:noFill/>
+        </p:spPr>
+        <p:txBody>
+          <a:bodyPr wrap="square">
+            <a:spAutoFit/>
+          </a:bodyPr>
+          <a:lstStyle/>
+          <a:p>
+            <a:r>
+              <a:rPr lang="en-US" sz="2400" b="1" dirty="0">
+                <a:solidFill>
+                  <a:schemeClr val="accent6">
+                    <a:lumMod val="60000"/>
+                    <a:lumOff val="40000"/>
+                  </a:schemeClr>
+                </a:solidFill>
+              </a:rPr>
+              <a:t># STEPS</a:t>
+            </a:r>
+            <a:endParaRPr lang="en-US" sz="2400" dirty="0">
+              <a:solidFill>
+                <a:schemeClr val="accent6">
+                  <a:lumMod val="60000"/>
+                  <a:lumOff val="40000"/>
+                </a:schemeClr>
+              </a:solidFill>
+            </a:endParaRPr>
+          </a:p>
+          <a:p>
+            <a:endParaRPr lang="en-US" sz="2400" dirty="0">
+              <a:solidFill>
+                <a:schemeClr val="accent6">
+                  <a:lumMod val="60000"/>
+                  <a:lumOff val="40000"/>
+                </a:schemeClr>
+              </a:solidFill>
+            </a:endParaRPr>
+          </a:p>
+          <a:p>
+            <a:r>
+              <a:rPr lang="en-US" sz="2400" b="1" dirty="0">
+                <a:solidFill>
+                  <a:schemeClr val="accent6">
+                    <a:lumMod val="60000"/>
+                    <a:lumOff val="40000"/>
+                  </a:schemeClr>
+                </a:solidFill>
+              </a:rPr>
+              <a:t>## Work with python3.11. </a:t>
+            </a:r>
+            <a:br>
+              <a:rPr lang="en-US" sz="2400" dirty="0">
+                <a:solidFill>
+                  <a:schemeClr val="accent6">
+                    <a:lumMod val="60000"/>
+                    <a:lumOff val="40000"/>
+                  </a:schemeClr>
+                </a:solidFill>
+              </a:rPr>
+            </a:br>
+            <a:r>
+              <a:rPr lang="en-US" sz="2400" b="1" dirty="0">
+                <a:solidFill>
+                  <a:schemeClr val="accent6">
+                    <a:lumMod val="60000"/>
+                    <a:lumOff val="40000"/>
+                  </a:schemeClr>
+                </a:solidFill>
+              </a:rPr>
+              <a:t>### 1) Create virtual environment </a:t>
+            </a:r>
+            <a:r>
+              <a:rPr lang="en-US" sz="2400" dirty="0">
+                <a:solidFill>
+                  <a:schemeClr val="accent6">
+                    <a:lumMod val="60000"/>
+                    <a:lumOff val="40000"/>
+                  </a:schemeClr>
+                </a:solidFill>
+              </a:rPr>
+              <a:t>(Took 2 minutes)</a:t>
+            </a:r>
+            <a:r>
+              <a:rPr lang="en-US" sz="2400" b="1" dirty="0">
+                <a:solidFill>
+                  <a:schemeClr val="accent6">
+                    <a:lumMod val="60000"/>
+                    <a:lumOff val="40000"/>
+                  </a:schemeClr>
+                </a:solidFill>
+              </a:rPr>
+              <a:t>:</a:t>
+            </a:r>
+            <a:endParaRPr lang="en-US" sz="2400" dirty="0">
+              <a:solidFill>
+                <a:schemeClr val="accent6">
+                  <a:lumMod val="60000"/>
+                  <a:lumOff val="40000"/>
+                </a:schemeClr>
+              </a:solidFill>
+            </a:endParaRPr>
+          </a:p>
+          <a:p>
+            <a:br>
+              <a:rPr lang="en-US" sz="2400" dirty="0">
+                <a:solidFill>
+                  <a:schemeClr val="accent6">
+                    <a:lumMod val="60000"/>
+                    <a:lumOff val="40000"/>
+                  </a:schemeClr>
+                </a:solidFill>
+              </a:rPr>
+            </a:br>
+            <a:r>
+              <a:rPr lang="en-US" sz="2400" dirty="0">
+                <a:solidFill>
+                  <a:schemeClr val="accent6">
+                    <a:lumMod val="60000"/>
+                    <a:lumOff val="40000"/>
+                  </a:schemeClr>
+                </a:solidFill>
+              </a:rPr>
+              <a:t>&gt; C:\Users\hi\AppData\Local\Programs\Python\Python311\python.exe -m </a:t>
+            </a:r>
+            <a:r>
+              <a:rPr lang="en-US" sz="2400" dirty="0" err="1">
+                <a:solidFill>
+                  <a:schemeClr val="accent6">
+                    <a:lumMod val="60000"/>
+                    <a:lumOff val="40000"/>
+                  </a:schemeClr>
+                </a:solidFill>
+              </a:rPr>
+              <a:t>venv</a:t>
+            </a:r>
+            <a:r>
+              <a:rPr lang="en-US" sz="2400" dirty="0">
+                <a:solidFill>
+                  <a:schemeClr val="accent6">
+                    <a:lumMod val="60000"/>
+                    <a:lumOff val="40000"/>
+                  </a:schemeClr>
+                </a:solidFill>
+              </a:rPr>
+              <a:t> .</a:t>
+            </a:r>
+            <a:r>
+              <a:rPr lang="en-US" sz="2400" dirty="0" err="1">
+                <a:solidFill>
+                  <a:schemeClr val="accent6">
+                    <a:lumMod val="60000"/>
+                    <a:lumOff val="40000"/>
+                  </a:schemeClr>
+                </a:solidFill>
+              </a:rPr>
+              <a:t>venv</a:t>
+            </a:r>
+            <a:endParaRPr lang="en-US" sz="2400" dirty="0">
+              <a:solidFill>
+                <a:schemeClr val="accent6">
+                  <a:lumMod val="60000"/>
+                  <a:lumOff val="40000"/>
+                </a:schemeClr>
+              </a:solidFill>
+            </a:endParaRPr>
+          </a:p>
+          <a:p>
+            <a:endParaRPr lang="en-US" sz="2400" dirty="0">
+              <a:solidFill>
+                <a:schemeClr val="accent6">
+                  <a:lumMod val="60000"/>
+                  <a:lumOff val="40000"/>
+                </a:schemeClr>
+              </a:solidFill>
+            </a:endParaRPr>
+          </a:p>
+          <a:p>
+            <a:endParaRPr lang="en-US" sz="2400" dirty="0">
+              <a:solidFill>
+                <a:schemeClr val="accent6">
+                  <a:lumMod val="60000"/>
+                  <a:lumOff val="40000"/>
+                </a:schemeClr>
+              </a:solidFill>
+            </a:endParaRPr>
+          </a:p>
+          <a:p>
+            <a:r>
+              <a:rPr lang="en-US" sz="2400" b="1" dirty="0">
+                <a:solidFill>
+                  <a:schemeClr val="accent6">
+                    <a:lumMod val="60000"/>
+                    <a:lumOff val="40000"/>
+                  </a:schemeClr>
+                </a:solidFill>
+              </a:rPr>
+              <a:t>### 2) Activate virtual environment</a:t>
+            </a:r>
+            <a:endParaRPr lang="en-US" sz="2400" dirty="0">
+              <a:solidFill>
+                <a:schemeClr val="accent6">
+                  <a:lumMod val="60000"/>
+                  <a:lumOff val="40000"/>
+                </a:schemeClr>
+              </a:solidFill>
+            </a:endParaRPr>
+          </a:p>
+          <a:p>
+            <a:endParaRPr lang="en-US" sz="2400" dirty="0">
+              <a:solidFill>
+                <a:schemeClr val="accent6">
+                  <a:lumMod val="60000"/>
+                  <a:lumOff val="40000"/>
+                </a:schemeClr>
+              </a:solidFill>
+            </a:endParaRPr>
+          </a:p>
+          <a:p>
+            <a:r>
+              <a:rPr lang="en-US" sz="2400" dirty="0">
+                <a:solidFill>
+                  <a:schemeClr val="accent6">
+                    <a:lumMod val="60000"/>
+                    <a:lumOff val="40000"/>
+                  </a:schemeClr>
+                </a:solidFill>
+              </a:rPr>
+              <a:t>&gt; .</a:t>
+            </a:r>
+            <a:r>
+              <a:rPr lang="en-US" sz="2400" dirty="0" err="1">
+                <a:solidFill>
+                  <a:schemeClr val="accent6">
+                    <a:lumMod val="60000"/>
+                    <a:lumOff val="40000"/>
+                  </a:schemeClr>
+                </a:solidFill>
+              </a:rPr>
+              <a:t>venv</a:t>
+            </a:r>
+            <a:r>
+              <a:rPr lang="en-US" sz="2400" dirty="0">
+                <a:solidFill>
+                  <a:schemeClr val="accent6">
+                    <a:lumMod val="60000"/>
+                    <a:lumOff val="40000"/>
+                  </a:schemeClr>
+                </a:solidFill>
+              </a:rPr>
+              <a:t>\Scripts\Activate.ps1</a:t>
+            </a:r>
+          </a:p>
+          <a:p>
+            <a:br>
+              <a:rPr lang="en-US" sz="2400" dirty="0">
+                <a:solidFill>
+                  <a:schemeClr val="accent6">
+                    <a:lumMod val="60000"/>
+                    <a:lumOff val="40000"/>
+                  </a:schemeClr>
+                </a:solidFill>
+              </a:rPr>
+            </a:br>
+            <a:endParaRPr lang="en-US" sz="2400" dirty="0">
+              <a:solidFill>
+                <a:schemeClr val="accent6">
+                  <a:lumMod val="60000"/>
+                  <a:lumOff val="40000"/>
+                </a:schemeClr>
+              </a:solidFill>
+            </a:endParaRPr>
+          </a:p>
+        </p:txBody>
+      </p:sp>
+    </p:spTree>
+    <p:extLst>
+      <p:ext uri="{BB962C8B-B14F-4D97-AF65-F5344CB8AC3E}">
+        <p14:creationId xmlns:p14="http://schemas.microsoft.com/office/powerpoint/2010/main" val="2478087190"/>
+      </p:ext>
+    </p:extLst>
+  </p:cSld>
+  <p:clrMapOvr>
+    <a:masterClrMapping/>
+  </p:clrMapOvr>
+</p:sld>
+</file>
+
+<file path=ppt/slides/slide4.xml><?xml version="1.0" encoding="utf-8"?>
 <p:sld xmlns:a="http://schemas.openxmlformats.org/drawingml/2006/main" xmlns:r="http://schemas.openxmlformats.org/officeDocument/2006/relationships" xmlns:p="http://schemas.openxmlformats.org/presentationml/2006/main">
   <p:cSld>
     <p:spTree>
@@ -5435,7 +5035,7 @@
 </p:sld>
 </file>
 
-<file path=ppt/slides/slide4.xml><?xml version="1.0" encoding="utf-8"?>
+<file path=ppt/slides/slide5.xml><?xml version="1.0" encoding="utf-8"?>
 <p:sld xmlns:a="http://schemas.openxmlformats.org/drawingml/2006/main" xmlns:r="http://schemas.openxmlformats.org/officeDocument/2006/relationships" xmlns:p="http://schemas.openxmlformats.org/presentationml/2006/main">
   <p:cSld>
     <p:spTree>
@@ -5473,7 +5073,7 @@
         <p:spPr>
           <a:xfrm>
             <a:off x="477520" y="226536"/>
-            <a:ext cx="11208512" cy="6740307"/>
+            <a:ext cx="11208512" cy="1200329"/>
           </a:xfrm>
           <a:prstGeom prst="rect">
             <a:avLst/>
@@ -5526,399 +5126,8 @@
                   </a:schemeClr>
                 </a:solidFill>
               </a:rPr>
-              <a:t>### 5) Install following packages from </a:t>
-            </a:r>
-            <a:r>
-              <a:rPr lang="en-US" sz="2400" b="1" dirty="0" err="1">
-                <a:solidFill>
-                  <a:schemeClr val="accent6">
-                    <a:lumMod val="60000"/>
-                    <a:lumOff val="40000"/>
-                  </a:schemeClr>
-                </a:solidFill>
-              </a:rPr>
-              <a:t>jupyter</a:t>
-            </a:r>
-            <a:r>
-              <a:rPr lang="en-US" sz="2400" b="1" dirty="0">
-                <a:solidFill>
-                  <a:schemeClr val="accent6">
-                    <a:lumMod val="60000"/>
-                    <a:lumOff val="40000"/>
-                  </a:schemeClr>
-                </a:solidFill>
-              </a:rPr>
-              <a:t> (or use python virtual end):</a:t>
-            </a:r>
-            <a:endParaRPr lang="en-US" sz="2400" dirty="0">
-              <a:solidFill>
-                <a:schemeClr val="accent6">
-                  <a:lumMod val="60000"/>
-                  <a:lumOff val="40000"/>
-                </a:schemeClr>
-              </a:solidFill>
-            </a:endParaRPr>
-          </a:p>
-          <a:p>
-            <a:br>
-              <a:rPr lang="en-US" sz="2400" dirty="0">
-                <a:solidFill>
-                  <a:schemeClr val="accent6">
-                    <a:lumMod val="60000"/>
-                    <a:lumOff val="40000"/>
-                  </a:schemeClr>
-                </a:solidFill>
-              </a:rPr>
-            </a:br>
-            <a:endParaRPr lang="en-US" sz="2400" dirty="0">
-              <a:solidFill>
-                <a:schemeClr val="accent6">
-                  <a:lumMod val="60000"/>
-                  <a:lumOff val="40000"/>
-                </a:schemeClr>
-              </a:solidFill>
-            </a:endParaRPr>
-          </a:p>
-          <a:p>
-            <a:r>
-              <a:rPr lang="en-US" sz="2400" b="1" dirty="0">
-                <a:solidFill>
-                  <a:schemeClr val="accent6">
-                    <a:lumMod val="60000"/>
-                    <a:lumOff val="40000"/>
-                  </a:schemeClr>
-                </a:solidFill>
-              </a:rPr>
-              <a:t>#### From </a:t>
-            </a:r>
-            <a:r>
-              <a:rPr lang="en-US" sz="2400" b="1" dirty="0" err="1">
-                <a:solidFill>
-                  <a:schemeClr val="accent6">
-                    <a:lumMod val="60000"/>
-                    <a:lumOff val="40000"/>
-                  </a:schemeClr>
-                </a:solidFill>
-              </a:rPr>
-              <a:t>Jupyter</a:t>
-            </a:r>
-            <a:r>
-              <a:rPr lang="en-US" sz="2400" b="1" dirty="0">
-                <a:solidFill>
-                  <a:schemeClr val="accent6">
-                    <a:lumMod val="60000"/>
-                    <a:lumOff val="40000"/>
-                  </a:schemeClr>
-                </a:solidFill>
-              </a:rPr>
-              <a:t> (Took 5 minutes)</a:t>
-            </a:r>
-            <a:endParaRPr lang="en-US" sz="2400" dirty="0">
-              <a:solidFill>
-                <a:schemeClr val="accent6">
-                  <a:lumMod val="60000"/>
-                  <a:lumOff val="40000"/>
-                </a:schemeClr>
-              </a:solidFill>
-            </a:endParaRPr>
-          </a:p>
-          <a:p>
-            <a:r>
-              <a:rPr lang="en-US" sz="2400" dirty="0">
-                <a:solidFill>
-                  <a:schemeClr val="accent6">
-                    <a:lumMod val="60000"/>
-                    <a:lumOff val="40000"/>
-                  </a:schemeClr>
-                </a:solidFill>
-              </a:rPr>
-              <a:t>&gt; !pip install </a:t>
-            </a:r>
-            <a:r>
-              <a:rPr lang="en-US" sz="2400" dirty="0" err="1">
-                <a:solidFill>
-                  <a:schemeClr val="accent6">
-                    <a:lumMod val="60000"/>
-                    <a:lumOff val="40000"/>
-                  </a:schemeClr>
-                </a:solidFill>
-              </a:rPr>
-              <a:t>langchain</a:t>
-            </a:r>
-            <a:r>
-              <a:rPr lang="en-US" sz="2400" dirty="0">
-                <a:solidFill>
-                  <a:schemeClr val="accent6">
-                    <a:lumMod val="60000"/>
-                    <a:lumOff val="40000"/>
-                  </a:schemeClr>
-                </a:solidFill>
-              </a:rPr>
-              <a:t>==0.2.14 </a:t>
-            </a:r>
-            <a:r>
-              <a:rPr lang="en-US" sz="2400" dirty="0" err="1">
-                <a:solidFill>
-                  <a:schemeClr val="accent6">
-                    <a:lumMod val="60000"/>
-                    <a:lumOff val="40000"/>
-                  </a:schemeClr>
-                </a:solidFill>
-              </a:rPr>
-              <a:t>langchain</a:t>
-            </a:r>
-            <a:r>
-              <a:rPr lang="en-US" sz="2400" dirty="0">
-                <a:solidFill>
-                  <a:schemeClr val="accent6">
-                    <a:lumMod val="60000"/>
-                    <a:lumOff val="40000"/>
-                  </a:schemeClr>
-                </a:solidFill>
-              </a:rPr>
-              <a:t>-community==0.2.12 </a:t>
-            </a:r>
-            <a:r>
-              <a:rPr lang="en-US" sz="2400" dirty="0" err="1">
-                <a:solidFill>
-                  <a:schemeClr val="accent6">
-                    <a:lumMod val="60000"/>
-                    <a:lumOff val="40000"/>
-                  </a:schemeClr>
-                </a:solidFill>
-              </a:rPr>
-              <a:t>langchain-openai</a:t>
-            </a:r>
-            <a:r>
-              <a:rPr lang="en-US" sz="2400" dirty="0">
-                <a:solidFill>
-                  <a:schemeClr val="accent6">
-                    <a:lumMod val="60000"/>
-                    <a:lumOff val="40000"/>
-                  </a:schemeClr>
-                </a:solidFill>
-              </a:rPr>
-              <a:t>==0.1.25</a:t>
-            </a:r>
-          </a:p>
-          <a:p>
-            <a:endParaRPr lang="en-US" sz="2400" dirty="0">
-              <a:solidFill>
-                <a:schemeClr val="accent6">
-                  <a:lumMod val="60000"/>
-                  <a:lumOff val="40000"/>
-                </a:schemeClr>
-              </a:solidFill>
-            </a:endParaRPr>
-          </a:p>
-          <a:p>
-            <a:r>
-              <a:rPr lang="en-US" sz="2400" dirty="0">
-                <a:solidFill>
-                  <a:schemeClr val="accent6">
-                    <a:lumMod val="60000"/>
-                    <a:lumOff val="40000"/>
-                  </a:schemeClr>
-                </a:solidFill>
-              </a:rPr>
-              <a:t>OR</a:t>
-            </a:r>
-          </a:p>
-          <a:p>
-            <a:br>
-              <a:rPr lang="en-US" sz="2400" dirty="0">
-                <a:solidFill>
-                  <a:schemeClr val="accent6">
-                    <a:lumMod val="60000"/>
-                    <a:lumOff val="40000"/>
-                  </a:schemeClr>
-                </a:solidFill>
-              </a:rPr>
-            </a:br>
-            <a:r>
-              <a:rPr lang="en-US" sz="2400" b="1" dirty="0">
-                <a:solidFill>
-                  <a:schemeClr val="accent6">
-                    <a:lumMod val="60000"/>
-                    <a:lumOff val="40000"/>
-                  </a:schemeClr>
-                </a:solidFill>
-              </a:rPr>
-              <a:t>#### From command line</a:t>
-            </a:r>
-            <a:endParaRPr lang="en-US" sz="2400" dirty="0">
-              <a:solidFill>
-                <a:schemeClr val="accent6">
-                  <a:lumMod val="60000"/>
-                  <a:lumOff val="40000"/>
-                </a:schemeClr>
-              </a:solidFill>
-            </a:endParaRPr>
-          </a:p>
-          <a:p>
-            <a:endParaRPr lang="en-US" sz="2400" dirty="0">
-              <a:solidFill>
-                <a:schemeClr val="accent6">
-                  <a:lumMod val="60000"/>
-                  <a:lumOff val="40000"/>
-                </a:schemeClr>
-              </a:solidFill>
-            </a:endParaRPr>
-          </a:p>
-          <a:p>
-            <a:r>
-              <a:rPr lang="en-US" sz="2400" dirty="0">
-                <a:solidFill>
-                  <a:schemeClr val="accent6">
-                    <a:lumMod val="60000"/>
-                    <a:lumOff val="40000"/>
-                  </a:schemeClr>
-                </a:solidFill>
-              </a:rPr>
-              <a:t>&gt; .\.</a:t>
-            </a:r>
-            <a:r>
-              <a:rPr lang="en-US" sz="2400" dirty="0" err="1">
-                <a:solidFill>
-                  <a:schemeClr val="accent6">
-                    <a:lumMod val="60000"/>
-                    <a:lumOff val="40000"/>
-                  </a:schemeClr>
-                </a:solidFill>
-              </a:rPr>
-              <a:t>venv</a:t>
-            </a:r>
-            <a:r>
-              <a:rPr lang="en-US" sz="2400" dirty="0">
-                <a:solidFill>
-                  <a:schemeClr val="accent6">
-                    <a:lumMod val="60000"/>
-                    <a:lumOff val="40000"/>
-                  </a:schemeClr>
-                </a:solidFill>
-              </a:rPr>
-              <a:t>\Scripts\python.exe pip install </a:t>
-            </a:r>
-            <a:r>
-              <a:rPr lang="en-US" sz="2400" dirty="0" err="1">
-                <a:solidFill>
-                  <a:schemeClr val="accent6">
-                    <a:lumMod val="60000"/>
-                    <a:lumOff val="40000"/>
-                  </a:schemeClr>
-                </a:solidFill>
-              </a:rPr>
-              <a:t>langchain</a:t>
-            </a:r>
-            <a:r>
-              <a:rPr lang="en-US" sz="2400" dirty="0">
-                <a:solidFill>
-                  <a:schemeClr val="accent6">
-                    <a:lumMod val="60000"/>
-                    <a:lumOff val="40000"/>
-                  </a:schemeClr>
-                </a:solidFill>
-              </a:rPr>
-              <a:t>==0.2.14 </a:t>
-            </a:r>
-            <a:r>
-              <a:rPr lang="en-US" sz="2400" dirty="0" err="1">
-                <a:solidFill>
-                  <a:schemeClr val="accent6">
-                    <a:lumMod val="60000"/>
-                    <a:lumOff val="40000"/>
-                  </a:schemeClr>
-                </a:solidFill>
-              </a:rPr>
-              <a:t>langchain</a:t>
-            </a:r>
-            <a:r>
-              <a:rPr lang="en-US" sz="2400" dirty="0">
-                <a:solidFill>
-                  <a:schemeClr val="accent6">
-                    <a:lumMod val="60000"/>
-                    <a:lumOff val="40000"/>
-                  </a:schemeClr>
-                </a:solidFill>
-              </a:rPr>
-              <a:t>-community==0.2.12 </a:t>
-            </a:r>
-            <a:r>
-              <a:rPr lang="en-US" sz="2400" dirty="0" err="1">
-                <a:solidFill>
-                  <a:schemeClr val="accent6">
-                    <a:lumMod val="60000"/>
-                    <a:lumOff val="40000"/>
-                  </a:schemeClr>
-                </a:solidFill>
-              </a:rPr>
-              <a:t>langchain-openai</a:t>
-            </a:r>
-            <a:r>
-              <a:rPr lang="en-US" sz="2400" dirty="0">
-                <a:solidFill>
-                  <a:schemeClr val="accent6">
-                    <a:lumMod val="60000"/>
-                    <a:lumOff val="40000"/>
-                  </a:schemeClr>
-                </a:solidFill>
-              </a:rPr>
-              <a:t>==0.1.25 </a:t>
-            </a:r>
-          </a:p>
-          <a:p>
-            <a:endParaRPr lang="en-US" sz="2400" dirty="0">
-              <a:solidFill>
-                <a:schemeClr val="accent6">
-                  <a:lumMod val="60000"/>
-                  <a:lumOff val="40000"/>
-                </a:schemeClr>
-              </a:solidFill>
-            </a:endParaRPr>
-          </a:p>
-          <a:p>
-            <a:r>
-              <a:rPr lang="en-US" sz="2400" b="1" u="sng" dirty="0">
-                <a:solidFill>
-                  <a:schemeClr val="accent6">
-                    <a:lumMod val="60000"/>
-                    <a:lumOff val="40000"/>
-                  </a:schemeClr>
-                </a:solidFill>
-              </a:rPr>
-              <a:t>R</a:t>
-            </a:r>
-            <a:r>
-              <a:rPr lang="en-US" sz="2400" b="1" u="sng">
-                <a:solidFill>
-                  <a:schemeClr val="accent6">
-                    <a:lumMod val="60000"/>
-                    <a:lumOff val="40000"/>
-                  </a:schemeClr>
-                </a:solidFill>
-              </a:rPr>
-              <a:t>estart the Kernel (To be Safe)</a:t>
-            </a:r>
-            <a:endParaRPr lang="en-US" sz="2400" b="1" u="sng" dirty="0">
-              <a:solidFill>
-                <a:schemeClr val="accent6">
-                  <a:lumMod val="60000"/>
-                  <a:lumOff val="40000"/>
-                </a:schemeClr>
-              </a:solidFill>
-            </a:endParaRPr>
-          </a:p>
-          <a:p>
-            <a:br>
-              <a:rPr lang="en-US" sz="2400" dirty="0">
-                <a:solidFill>
-                  <a:schemeClr val="accent6">
-                    <a:lumMod val="60000"/>
-                    <a:lumOff val="40000"/>
-                  </a:schemeClr>
-                </a:solidFill>
-              </a:rPr>
-            </a:br>
+              <a:t>### 5) Install following packages located in  requirements.txt</a:t>
+            </a:r>
             <a:endParaRPr lang="en-US" sz="2400" dirty="0">
               <a:solidFill>
                 <a:schemeClr val="accent6">
@@ -5943,7 +5152,7 @@
 </p:sld>
 </file>
 
-<file path=ppt/slides/slide5.xml><?xml version="1.0" encoding="utf-8"?>
+<file path=ppt/slides/slide6.xml><?xml version="1.0" encoding="utf-8"?>
 <p:sld xmlns:a="http://schemas.openxmlformats.org/drawingml/2006/main" xmlns:r="http://schemas.openxmlformats.org/officeDocument/2006/relationships" xmlns:p="http://schemas.openxmlformats.org/presentationml/2006/main">
   <p:cSld>
     <p:spTree>
@@ -5966,52 +5175,22 @@
           <a:chExt cx="0" cy="0"/>
         </a:xfrm>
       </p:grpSpPr>
-      <p:pic>
-        <p:nvPicPr>
-          <p:cNvPr id="5" name="Picture 4">
-            <a:extLst>
-              <a:ext uri="{FF2B5EF4-FFF2-40B4-BE49-F238E27FC236}">
-                <a16:creationId xmlns:a16="http://schemas.microsoft.com/office/drawing/2014/main" id="{B432592D-480F-AA11-EAC6-2DEDB09BDE7C}"/>
-              </a:ext>
-            </a:extLst>
-          </p:cNvPr>
-          <p:cNvPicPr>
-            <a:picLocks noChangeAspect="1"/>
-          </p:cNvPicPr>
+      <p:sp>
+        <p:nvSpPr>
+          <p:cNvPr id="6" name="TextBox 5">
+            <a:extLst>
+              <a:ext uri="{FF2B5EF4-FFF2-40B4-BE49-F238E27FC236}">
+                <a16:creationId xmlns:a16="http://schemas.microsoft.com/office/drawing/2014/main" id="{11FB5772-EE55-4F18-4D50-BB811EA55F75}"/>
+              </a:ext>
+            </a:extLst>
+          </p:cNvPr>
+          <p:cNvSpPr txBox="1"/>
           <p:nvPr/>
-        </p:nvPicPr>
-        <p:blipFill>
-          <a:blip r:embed="rId2"/>
-          <a:stretch>
-            <a:fillRect/>
-          </a:stretch>
-        </p:blipFill>
+        </p:nvSpPr>
         <p:spPr>
           <a:xfrm>
-            <a:off x="1937632" y="457368"/>
-            <a:ext cx="9543213" cy="4784399"/>
-          </a:xfrm>
-          <a:prstGeom prst="rect">
-            <a:avLst/>
-          </a:prstGeom>
-        </p:spPr>
-      </p:pic>
-      <p:sp>
-        <p:nvSpPr>
-          <p:cNvPr id="6" name="TextBox 5">
-            <a:extLst>
-              <a:ext uri="{FF2B5EF4-FFF2-40B4-BE49-F238E27FC236}">
-                <a16:creationId xmlns:a16="http://schemas.microsoft.com/office/drawing/2014/main" id="{11FB5772-EE55-4F18-4D50-BB811EA55F75}"/>
-              </a:ext>
-            </a:extLst>
-          </p:cNvPr>
-          <p:cNvSpPr txBox="1"/>
-          <p:nvPr/>
-        </p:nvSpPr>
-        <p:spPr>
-          <a:xfrm>
-            <a:off x="221488" y="43656"/>
-            <a:ext cx="2000504" cy="461665"/>
+            <a:off x="1984248" y="1314672"/>
+            <a:ext cx="7790688" cy="830997"/>
           </a:xfrm>
           <a:prstGeom prst="rect">
             <a:avLst/>
@@ -6033,16 +5212,54 @@
                   </a:schemeClr>
                 </a:solidFill>
               </a:rPr>
-              <a:t>Code</a:t>
-            </a:r>
-            <a:endParaRPr lang="en-US" sz="2400" dirty="0">
-              <a:solidFill>
-                <a:schemeClr val="accent6">
-                  <a:lumMod val="60000"/>
-                  <a:lumOff val="40000"/>
-                </a:schemeClr>
-              </a:solidFill>
-            </a:endParaRPr>
+              <a:t>Code: step1 - </a:t>
+            </a:r>
+            <a:r>
+              <a:rPr lang="en-US" sz="2400" dirty="0">
+                <a:solidFill>
+                  <a:schemeClr val="accent6">
+                    <a:lumMod val="60000"/>
+                    <a:lumOff val="40000"/>
+                  </a:schemeClr>
+                </a:solidFill>
+              </a:rPr>
+              <a:t>Run </a:t>
+            </a:r>
+            <a:r>
+              <a:rPr lang="en-US" sz="2400" dirty="0" err="1">
+                <a:solidFill>
+                  <a:schemeClr val="accent6">
+                    <a:lumMod val="60000"/>
+                    <a:lumOff val="40000"/>
+                  </a:schemeClr>
+                </a:solidFill>
+              </a:rPr>
+              <a:t>jupyter</a:t>
+            </a:r>
+            <a:r>
+              <a:rPr lang="en-US" sz="2400" dirty="0">
+                <a:solidFill>
+                  <a:schemeClr val="accent6">
+                    <a:lumMod val="60000"/>
+                    <a:lumOff val="40000"/>
+                  </a:schemeClr>
+                </a:solidFill>
+              </a:rPr>
+              <a:t> notebook</a:t>
+            </a:r>
+          </a:p>
+          <a:p>
+            <a:r>
+              <a:rPr lang="en-US" sz="2400" dirty="0">
+                <a:solidFill>
+                  <a:schemeClr val="accent6">
+                    <a:lumMod val="60000"/>
+                    <a:lumOff val="40000"/>
+                  </a:schemeClr>
+                </a:solidFill>
+              </a:rPr>
+              <a:t>step_1_agent_with_2Tools_weather_calculator.ipynb</a:t>
+            </a:r>
           </a:p>
         </p:txBody>
       </p:sp>
@@ -6050,122 +5267,6 @@
     <p:extLst>
       <p:ext uri="{BB962C8B-B14F-4D97-AF65-F5344CB8AC3E}">
         <p14:creationId xmlns:p14="http://schemas.microsoft.com/office/powerpoint/2010/main" val="1909971217"/>
-      </p:ext>
-    </p:extLst>
-  </p:cSld>
-  <p:clrMapOvr>
-    <a:masterClrMapping/>
-  </p:clrMapOvr>
-</p:sld>
-</file>
-
-<file path=ppt/slides/slide6.xml><?xml version="1.0" encoding="utf-8"?>
-<p:sld xmlns:a="http://schemas.openxmlformats.org/drawingml/2006/main" xmlns:r="http://schemas.openxmlformats.org/officeDocument/2006/relationships" xmlns:p="http://schemas.openxmlformats.org/presentationml/2006/main">
-  <p:cSld>
-    <p:spTree>
-      <p:nvGrpSpPr>
-        <p:cNvPr id="1" name="">
-          <a:extLst>
-            <a:ext uri="{FF2B5EF4-FFF2-40B4-BE49-F238E27FC236}">
-              <a16:creationId xmlns:a16="http://schemas.microsoft.com/office/drawing/2014/main" id="{CB17C5D9-D42A-2244-7458-E7C5650D8C00}"/>
-            </a:ext>
-          </a:extLst>
-        </p:cNvPr>
-        <p:cNvGrpSpPr/>
-        <p:nvPr/>
-      </p:nvGrpSpPr>
-      <p:grpSpPr>
-        <a:xfrm>
-          <a:off x="0" y="0"/>
-          <a:ext cx="0" cy="0"/>
-          <a:chOff x="0" y="0"/>
-          <a:chExt cx="0" cy="0"/>
-        </a:xfrm>
-      </p:grpSpPr>
-      <p:pic>
-        <p:nvPicPr>
-          <p:cNvPr id="3" name="Picture 2">
-            <a:extLst>
-              <a:ext uri="{FF2B5EF4-FFF2-40B4-BE49-F238E27FC236}">
-                <a16:creationId xmlns:a16="http://schemas.microsoft.com/office/drawing/2014/main" id="{E407464F-B202-85E1-622E-2339970C6751}"/>
-              </a:ext>
-            </a:extLst>
-          </p:cNvPr>
-          <p:cNvPicPr>
-            <a:picLocks noChangeAspect="1"/>
-          </p:cNvPicPr>
-          <p:nvPr/>
-        </p:nvPicPr>
-        <p:blipFill>
-          <a:blip r:embed="rId2"/>
-          <a:stretch>
-            <a:fillRect/>
-          </a:stretch>
-        </p:blipFill>
-        <p:spPr>
-          <a:xfrm>
-            <a:off x="950975" y="926117"/>
-            <a:ext cx="9115783" cy="3147897"/>
-          </a:xfrm>
-          <a:prstGeom prst="rect">
-            <a:avLst/>
-          </a:prstGeom>
-        </p:spPr>
-      </p:pic>
-      <p:sp>
-        <p:nvSpPr>
-          <p:cNvPr id="4" name="TextBox 3">
-            <a:extLst>
-              <a:ext uri="{FF2B5EF4-FFF2-40B4-BE49-F238E27FC236}">
-                <a16:creationId xmlns:a16="http://schemas.microsoft.com/office/drawing/2014/main" id="{F561EAEB-CCC6-C22D-EC4F-B05080377863}"/>
-              </a:ext>
-            </a:extLst>
-          </p:cNvPr>
-          <p:cNvSpPr txBox="1"/>
-          <p:nvPr/>
-        </p:nvSpPr>
-        <p:spPr>
-          <a:xfrm>
-            <a:off x="221488" y="43656"/>
-            <a:ext cx="2000504" cy="461665"/>
-          </a:xfrm>
-          <a:prstGeom prst="rect">
-            <a:avLst/>
-          </a:prstGeom>
-          <a:noFill/>
-        </p:spPr>
-        <p:txBody>
-          <a:bodyPr wrap="square">
-            <a:spAutoFit/>
-          </a:bodyPr>
-          <a:lstStyle/>
-          <a:p>
-            <a:r>
-              <a:rPr lang="en-US" sz="2400" b="1" dirty="0">
-                <a:solidFill>
-                  <a:schemeClr val="accent6">
-                    <a:lumMod val="60000"/>
-                    <a:lumOff val="40000"/>
-                  </a:schemeClr>
-                </a:solidFill>
-              </a:rPr>
-              <a:t>Code</a:t>
-            </a:r>
-            <a:endParaRPr lang="en-US" sz="2400" dirty="0">
-              <a:solidFill>
-                <a:schemeClr val="accent6">
-                  <a:lumMod val="60000"/>
-                  <a:lumOff val="40000"/>
-                </a:schemeClr>
-              </a:solidFill>
-            </a:endParaRPr>
-          </a:p>
-        </p:txBody>
-      </p:sp>
-    </p:spTree>
-    <p:extLst>
-      <p:ext uri="{BB962C8B-B14F-4D97-AF65-F5344CB8AC3E}">
-        <p14:creationId xmlns:p14="http://schemas.microsoft.com/office/powerpoint/2010/main" val="4000045214"/>
       </p:ext>
     </p:extLst>
   </p:cSld>
@@ -6183,7 +5284,7 @@
         <p:cNvPr id="1" name="">
           <a:extLst>
             <a:ext uri="{FF2B5EF4-FFF2-40B4-BE49-F238E27FC236}">
-              <a16:creationId xmlns:a16="http://schemas.microsoft.com/office/drawing/2014/main" id="{79D7D05D-9403-975D-17EA-3D115FEF949B}"/>
+              <a16:creationId xmlns:a16="http://schemas.microsoft.com/office/drawing/2014/main" id="{9B05A5F4-15D2-150A-2B0B-099D2A6C66C7}"/>
             </a:ext>
           </a:extLst>
         </p:cNvPr>
@@ -6198,52 +5299,22 @@
           <a:chExt cx="0" cy="0"/>
         </a:xfrm>
       </p:grpSpPr>
-      <p:pic>
-        <p:nvPicPr>
-          <p:cNvPr id="4" name="Picture 3">
-            <a:extLst>
-              <a:ext uri="{FF2B5EF4-FFF2-40B4-BE49-F238E27FC236}">
-                <a16:creationId xmlns:a16="http://schemas.microsoft.com/office/drawing/2014/main" id="{AB143522-DA7B-16A9-34A2-BF38EC298A0F}"/>
-              </a:ext>
-            </a:extLst>
-          </p:cNvPr>
-          <p:cNvPicPr>
-            <a:picLocks noChangeAspect="1"/>
-          </p:cNvPicPr>
+      <p:sp>
+        <p:nvSpPr>
+          <p:cNvPr id="6" name="TextBox 5">
+            <a:extLst>
+              <a:ext uri="{FF2B5EF4-FFF2-40B4-BE49-F238E27FC236}">
+                <a16:creationId xmlns:a16="http://schemas.microsoft.com/office/drawing/2014/main" id="{2260676C-7C80-9072-6642-8A647AE679A6}"/>
+              </a:ext>
+            </a:extLst>
+          </p:cNvPr>
+          <p:cNvSpPr txBox="1"/>
           <p:nvPr/>
-        </p:nvPicPr>
-        <p:blipFill>
-          <a:blip r:embed="rId2"/>
-          <a:stretch>
-            <a:fillRect/>
-          </a:stretch>
-        </p:blipFill>
+        </p:nvSpPr>
         <p:spPr>
           <a:xfrm>
-            <a:off x="1700784" y="71906"/>
-            <a:ext cx="12310872" cy="6714188"/>
-          </a:xfrm>
-          <a:prstGeom prst="rect">
-            <a:avLst/>
-          </a:prstGeom>
-        </p:spPr>
-      </p:pic>
-      <p:sp>
-        <p:nvSpPr>
-          <p:cNvPr id="5" name="TextBox 4">
-            <a:extLst>
-              <a:ext uri="{FF2B5EF4-FFF2-40B4-BE49-F238E27FC236}">
-                <a16:creationId xmlns:a16="http://schemas.microsoft.com/office/drawing/2014/main" id="{1B48E45C-C508-805D-393A-6557C9D0D27E}"/>
-              </a:ext>
-            </a:extLst>
-          </p:cNvPr>
-          <p:cNvSpPr txBox="1"/>
-          <p:nvPr/>
-        </p:nvSpPr>
-        <p:spPr>
-          <a:xfrm>
-            <a:off x="221488" y="43656"/>
-            <a:ext cx="2000504" cy="461665"/>
+            <a:off x="820928" y="1131792"/>
+            <a:ext cx="10550144" cy="461665"/>
           </a:xfrm>
           <a:prstGeom prst="rect">
             <a:avLst/>
@@ -6265,7 +5336,29 @@
                   </a:schemeClr>
                 </a:solidFill>
               </a:rPr>
-              <a:t>Code</a:t>
+              <a:t>Code: step2 – Run </a:t>
+            </a:r>
+            <a:r>
+              <a:rPr lang="en-US" sz="2400" b="1" dirty="0" err="1">
+                <a:solidFill>
+                  <a:schemeClr val="accent6">
+                    <a:lumMod val="60000"/>
+                    <a:lumOff val="40000"/>
+                  </a:schemeClr>
+                </a:solidFill>
+              </a:rPr>
+              <a:t>streamlit</a:t>
+            </a:r>
+            <a:r>
+              <a:rPr lang="en-US" sz="2400" b="1" dirty="0">
+                <a:solidFill>
+                  <a:schemeClr val="accent6">
+                    <a:lumMod val="60000"/>
+                    <a:lumOff val="40000"/>
+                  </a:schemeClr>
+                </a:solidFill>
+              </a:rPr>
+              <a:t> app</a:t>
             </a:r>
             <a:endParaRPr lang="en-US" sz="2400" dirty="0">
               <a:solidFill>
@@ -6281,7 +5374,7 @@
     </p:spTree>
     <p:extLst>
       <p:ext uri="{BB962C8B-B14F-4D97-AF65-F5344CB8AC3E}">
-        <p14:creationId xmlns:p14="http://schemas.microsoft.com/office/powerpoint/2010/main" val="3897465011"/>
+        <p14:creationId xmlns:p14="http://schemas.microsoft.com/office/powerpoint/2010/main" val="786213282"/>
       </p:ext>
     </p:extLst>
   </p:cSld>
@@ -6299,7 +5392,7 @@
         <p:cNvPr id="1" name="">
           <a:extLst>
             <a:ext uri="{FF2B5EF4-FFF2-40B4-BE49-F238E27FC236}">
-              <a16:creationId xmlns:a16="http://schemas.microsoft.com/office/drawing/2014/main" id="{7AF0DFB7-64FC-4B62-9417-D83253512F5C}"/>
+              <a16:creationId xmlns:a16="http://schemas.microsoft.com/office/drawing/2014/main" id="{F25673E9-841C-1E2C-F7B9-1F27718AFE8C}"/>
             </a:ext>
           </a:extLst>
         </p:cNvPr>
@@ -6316,10 +5409,10 @@
       </p:grpSpPr>
       <p:sp>
         <p:nvSpPr>
-          <p:cNvPr id="9" name="TextBox 8">
-            <a:extLst>
-              <a:ext uri="{FF2B5EF4-FFF2-40B4-BE49-F238E27FC236}">
-                <a16:creationId xmlns:a16="http://schemas.microsoft.com/office/drawing/2014/main" id="{5CE13038-2950-55BD-127B-522FCDAB30F9}"/>
+          <p:cNvPr id="5" name="TextBox 4">
+            <a:extLst>
+              <a:ext uri="{FF2B5EF4-FFF2-40B4-BE49-F238E27FC236}">
+                <a16:creationId xmlns:a16="http://schemas.microsoft.com/office/drawing/2014/main" id="{CD27D2BC-98ED-4BDD-EEAC-18E42CB67E8C}"/>
               </a:ext>
             </a:extLst>
           </p:cNvPr>
@@ -6329,7 +5422,7 @@
         <p:spPr>
           <a:xfrm>
             <a:off x="221488" y="43656"/>
-            <a:ext cx="2000504" cy="461665"/>
+            <a:ext cx="7788656" cy="4524315"/>
           </a:xfrm>
           <a:prstGeom prst="rect">
             <a:avLst/>
@@ -6351,7 +5444,86 @@
                   </a:schemeClr>
                 </a:solidFill>
               </a:rPr>
-              <a:t>Code</a:t>
+              <a:t>Now we put this in </a:t>
+            </a:r>
+            <a:r>
+              <a:rPr lang="en-US" sz="2400" b="1" dirty="0" err="1">
+                <a:solidFill>
+                  <a:schemeClr val="accent6">
+                    <a:lumMod val="60000"/>
+                    <a:lumOff val="40000"/>
+                  </a:schemeClr>
+                </a:solidFill>
+              </a:rPr>
+              <a:t>streamlit</a:t>
+            </a:r>
+            <a:endParaRPr lang="en-US" sz="2400" b="1" dirty="0">
+              <a:solidFill>
+                <a:schemeClr val="accent6">
+                  <a:lumMod val="60000"/>
+                  <a:lumOff val="40000"/>
+                </a:schemeClr>
+              </a:solidFill>
+            </a:endParaRPr>
+          </a:p>
+          <a:p>
+            <a:pPr marL="457200" indent="-457200">
+              <a:buAutoNum type="arabicParenR"/>
+            </a:pPr>
+            <a:r>
+              <a:rPr lang="en-US" sz="2400" b="1" dirty="0">
+                <a:solidFill>
+                  <a:schemeClr val="accent6">
+                    <a:lumMod val="60000"/>
+                    <a:lumOff val="40000"/>
+                  </a:schemeClr>
+                </a:solidFill>
+              </a:rPr>
+              <a:t>Install </a:t>
+            </a:r>
+            <a:r>
+              <a:rPr lang="en-US" sz="2400" b="1" dirty="0" err="1">
+                <a:solidFill>
+                  <a:schemeClr val="accent6">
+                    <a:lumMod val="60000"/>
+                    <a:lumOff val="40000"/>
+                  </a:schemeClr>
+                </a:solidFill>
+              </a:rPr>
+              <a:t>streamlit</a:t>
+            </a:r>
+            <a:r>
+              <a:rPr lang="en-US" sz="2400" b="1" dirty="0">
+                <a:solidFill>
+                  <a:schemeClr val="accent6">
+                    <a:lumMod val="60000"/>
+                    <a:lumOff val="40000"/>
+                  </a:schemeClr>
+                </a:solidFill>
+              </a:rPr>
+              <a:t>: </a:t>
+            </a:r>
+            <a:r>
+              <a:rPr lang="en-US" sz="2400" dirty="0">
+                <a:solidFill>
+                  <a:schemeClr val="accent6">
+                    <a:lumMod val="60000"/>
+                    <a:lumOff val="40000"/>
+                  </a:schemeClr>
+                </a:solidFill>
+              </a:rPr>
+              <a:t> python -m pip install </a:t>
+            </a:r>
+            <a:r>
+              <a:rPr lang="en-US" sz="2400" dirty="0" err="1">
+                <a:solidFill>
+                  <a:schemeClr val="accent6">
+                    <a:lumMod val="60000"/>
+                    <a:lumOff val="40000"/>
+                  </a:schemeClr>
+                </a:solidFill>
+              </a:rPr>
+              <a:t>streamlit</a:t>
             </a:r>
             <a:endParaRPr lang="en-US" sz="2400" dirty="0">
               <a:solidFill>
@@ -6362,6 +5534,118 @@
               </a:solidFill>
             </a:endParaRPr>
           </a:p>
+          <a:p>
+            <a:endParaRPr lang="en-US" sz="2400" dirty="0">
+              <a:solidFill>
+                <a:schemeClr val="accent6">
+                  <a:lumMod val="60000"/>
+                  <a:lumOff val="40000"/>
+                </a:schemeClr>
+              </a:solidFill>
+            </a:endParaRPr>
+          </a:p>
+          <a:p>
+            <a:endParaRPr lang="en-US" sz="2400" dirty="0">
+              <a:solidFill>
+                <a:schemeClr val="accent6">
+                  <a:lumMod val="60000"/>
+                  <a:lumOff val="40000"/>
+                </a:schemeClr>
+              </a:solidFill>
+            </a:endParaRPr>
+          </a:p>
+          <a:p>
+            <a:endParaRPr lang="en-US" sz="2400" dirty="0">
+              <a:solidFill>
+                <a:schemeClr val="accent6">
+                  <a:lumMod val="60000"/>
+                  <a:lumOff val="40000"/>
+                </a:schemeClr>
+              </a:solidFill>
+            </a:endParaRPr>
+          </a:p>
+          <a:p>
+            <a:r>
+              <a:rPr lang="en-US" sz="2400" dirty="0">
+                <a:solidFill>
+                  <a:schemeClr val="accent6">
+                    <a:lumMod val="60000"/>
+                    <a:lumOff val="40000"/>
+                  </a:schemeClr>
+                </a:solidFill>
+              </a:rPr>
+              <a:t>2) Create file </a:t>
+            </a:r>
+          </a:p>
+          <a:p>
+            <a:r>
+              <a:rPr lang="en-US" sz="2400" dirty="0">
+                <a:solidFill>
+                  <a:schemeClr val="accent6">
+                    <a:lumMod val="60000"/>
+                    <a:lumOff val="40000"/>
+                  </a:schemeClr>
+                </a:solidFill>
+              </a:rPr>
+              <a:t>step2_agent_logic.py </a:t>
+            </a:r>
+          </a:p>
+          <a:p>
+            <a:r>
+              <a:rPr lang="en-US" sz="2400" dirty="0">
+                <a:solidFill>
+                  <a:schemeClr val="accent6">
+                    <a:lumMod val="60000"/>
+                    <a:lumOff val="40000"/>
+                  </a:schemeClr>
+                </a:solidFill>
+              </a:rPr>
+              <a:t>and put the code in  there</a:t>
+            </a:r>
+          </a:p>
+          <a:p>
+            <a:endParaRPr lang="en-US" sz="2400" dirty="0">
+              <a:solidFill>
+                <a:schemeClr val="accent6">
+                  <a:lumMod val="60000"/>
+                  <a:lumOff val="40000"/>
+                </a:schemeClr>
+              </a:solidFill>
+            </a:endParaRPr>
+          </a:p>
+          <a:p>
+            <a:endParaRPr lang="en-US" sz="2400" dirty="0">
+              <a:solidFill>
+                <a:schemeClr val="accent6">
+                  <a:lumMod val="60000"/>
+                  <a:lumOff val="40000"/>
+                </a:schemeClr>
+              </a:solidFill>
+            </a:endParaRPr>
+          </a:p>
+          <a:p>
+            <a:r>
+              <a:rPr lang="en-US" sz="2400" dirty="0">
+                <a:solidFill>
+                  <a:schemeClr val="accent6">
+                    <a:lumMod val="60000"/>
+                    <a:lumOff val="40000"/>
+                  </a:schemeClr>
+                </a:solidFill>
+              </a:rPr>
+              <a:t>3) Create app.py </a:t>
+            </a:r>
+          </a:p>
+          <a:p>
+            <a:endParaRPr lang="en-US" sz="2400" dirty="0">
+              <a:solidFill>
+                <a:schemeClr val="accent6">
+                  <a:lumMod val="60000"/>
+                  <a:lumOff val="40000"/>
+                </a:schemeClr>
+              </a:solidFill>
+            </a:endParaRPr>
+          </a:p>
         </p:txBody>
       </p:sp>
       <p:pic>
@@ -6369,7 +5653,7 @@
           <p:cNvPr id="3" name="Picture 2">
             <a:extLst>
               <a:ext uri="{FF2B5EF4-FFF2-40B4-BE49-F238E27FC236}">
-                <a16:creationId xmlns:a16="http://schemas.microsoft.com/office/drawing/2014/main" id="{6A0C1F85-2B67-747D-A477-8DF009FC4859}"/>
+                <a16:creationId xmlns:a16="http://schemas.microsoft.com/office/drawing/2014/main" id="{86EB1BD4-2705-A1B4-F4A3-B96925B13402}"/>
               </a:ext>
             </a:extLst>
           </p:cNvPr>
@@ -6379,25 +5663,166 @@
           <p:nvPr/>
         </p:nvPicPr>
         <p:blipFill>
-          <a:blip r:embed="rId2"/>
+          <a:blip r:embed="rId2">
+            <a:extLst>
+              <a:ext uri="{28A0092B-C50C-407E-A947-70E740481C1C}">
+                <a14:useLocalDpi xmlns:a14="http://schemas.microsoft.com/office/drawing/2010/main" val="0"/>
+              </a:ext>
+            </a:extLst>
+          </a:blip>
           <a:stretch>
             <a:fillRect/>
           </a:stretch>
         </p:blipFill>
         <p:spPr>
           <a:xfrm>
-            <a:off x="285496" y="473235"/>
-            <a:ext cx="9726499" cy="6384765"/>
+            <a:off x="4197097" y="914380"/>
+            <a:ext cx="7994904" cy="4761587"/>
           </a:xfrm>
           <a:prstGeom prst="rect">
             <a:avLst/>
           </a:prstGeom>
         </p:spPr>
       </p:pic>
+      <p:sp>
+        <p:nvSpPr>
+          <p:cNvPr id="8" name="TextBox 7">
+            <a:extLst>
+              <a:ext uri="{FF2B5EF4-FFF2-40B4-BE49-F238E27FC236}">
+                <a16:creationId xmlns:a16="http://schemas.microsoft.com/office/drawing/2014/main" id="{6234C675-4CB1-C112-240C-32A9AB63B61E}"/>
+              </a:ext>
+            </a:extLst>
+          </p:cNvPr>
+          <p:cNvSpPr txBox="1"/>
+          <p:nvPr/>
+        </p:nvSpPr>
+        <p:spPr>
+          <a:xfrm>
+            <a:off x="224028" y="4869841"/>
+            <a:ext cx="5664708" cy="1938992"/>
+          </a:xfrm>
+          <a:prstGeom prst="rect">
+            <a:avLst/>
+          </a:prstGeom>
+          <a:noFill/>
+        </p:spPr>
+        <p:txBody>
+          <a:bodyPr wrap="square">
+            <a:spAutoFit/>
+          </a:bodyPr>
+          <a:lstStyle/>
+          <a:p>
+            <a:r>
+              <a:rPr lang="en-US" sz="2400" dirty="0">
+                <a:solidFill>
+                  <a:schemeClr val="accent6">
+                    <a:lumMod val="60000"/>
+                    <a:lumOff val="40000"/>
+                  </a:schemeClr>
+                </a:solidFill>
+              </a:rPr>
+              <a:t>4) Goto same </a:t>
+            </a:r>
+            <a:r>
+              <a:rPr lang="en-US" sz="2400" dirty="0" err="1">
+                <a:solidFill>
+                  <a:schemeClr val="accent6">
+                    <a:lumMod val="60000"/>
+                    <a:lumOff val="40000"/>
+                  </a:schemeClr>
+                </a:solidFill>
+              </a:rPr>
+              <a:t>dir</a:t>
+            </a:r>
+            <a:r>
+              <a:rPr lang="en-US" sz="2400" dirty="0">
+                <a:solidFill>
+                  <a:schemeClr val="accent6">
+                    <a:lumMod val="60000"/>
+                    <a:lumOff val="40000"/>
+                  </a:schemeClr>
+                </a:solidFill>
+              </a:rPr>
+              <a:t> that contains</a:t>
+            </a:r>
+          </a:p>
+          <a:p>
+            <a:r>
+              <a:rPr lang="en-US" sz="2400" dirty="0">
+                <a:solidFill>
+                  <a:schemeClr val="accent6">
+                    <a:lumMod val="60000"/>
+                    <a:lumOff val="40000"/>
+                  </a:schemeClr>
+                </a:solidFill>
+              </a:rPr>
+              <a:t>app.py and Run </a:t>
+            </a:r>
+          </a:p>
+          <a:p>
+            <a:r>
+              <a:rPr lang="en-US" sz="2400" dirty="0">
+                <a:solidFill>
+                  <a:schemeClr val="accent6">
+                    <a:lumMod val="60000"/>
+                    <a:lumOff val="40000"/>
+                  </a:schemeClr>
+                </a:solidFill>
+              </a:rPr>
+              <a:t>&gt; python -m </a:t>
+            </a:r>
+            <a:r>
+              <a:rPr lang="en-US" sz="2400" dirty="0" err="1">
+                <a:solidFill>
+                  <a:schemeClr val="accent6">
+                    <a:lumMod val="60000"/>
+                    <a:lumOff val="40000"/>
+                  </a:schemeClr>
+                </a:solidFill>
+              </a:rPr>
+              <a:t>streamlit</a:t>
+            </a:r>
+            <a:r>
+              <a:rPr lang="en-US" sz="2400" dirty="0">
+                <a:solidFill>
+                  <a:schemeClr val="accent6">
+                    <a:lumMod val="60000"/>
+                    <a:lumOff val="40000"/>
+                  </a:schemeClr>
+                </a:solidFill>
+              </a:rPr>
+              <a:t> run app.py</a:t>
+            </a:r>
+          </a:p>
+          <a:p>
+            <a:endParaRPr lang="en-US" sz="2400" dirty="0">
+              <a:solidFill>
+                <a:schemeClr val="accent6">
+                  <a:lumMod val="60000"/>
+                  <a:lumOff val="40000"/>
+                </a:schemeClr>
+              </a:solidFill>
+            </a:endParaRPr>
+          </a:p>
+          <a:p>
+            <a:r>
+              <a:rPr lang="en-US" sz="2400" dirty="0">
+                <a:solidFill>
+                  <a:schemeClr val="accent6">
+                    <a:lumMod val="60000"/>
+                    <a:lumOff val="40000"/>
+                  </a:schemeClr>
+                </a:solidFill>
+              </a:rPr>
+              <a:t>(See the screenshot of the output)</a:t>
+            </a:r>
+          </a:p>
+        </p:txBody>
+      </p:sp>
     </p:spTree>
     <p:extLst>
       <p:ext uri="{BB962C8B-B14F-4D97-AF65-F5344CB8AC3E}">
-        <p14:creationId xmlns:p14="http://schemas.microsoft.com/office/powerpoint/2010/main" val="2793771001"/>
+        <p14:creationId xmlns:p14="http://schemas.microsoft.com/office/powerpoint/2010/main" val="2590755268"/>
       </p:ext>
     </p:extLst>
   </p:cSld>
@@ -6415,7 +5840,7 @@
         <p:cNvPr id="1" name="">
           <a:extLst>
             <a:ext uri="{FF2B5EF4-FFF2-40B4-BE49-F238E27FC236}">
-              <a16:creationId xmlns:a16="http://schemas.microsoft.com/office/drawing/2014/main" id="{DEF39028-397E-1067-1A5D-546BB87FB388}"/>
+              <a16:creationId xmlns:a16="http://schemas.microsoft.com/office/drawing/2014/main" id="{DD931D7F-4279-DA2E-FA64-6CF3C441D414}"/>
             </a:ext>
           </a:extLst>
         </p:cNvPr>
@@ -6430,120 +5855,10 @@
           <a:chExt cx="0" cy="0"/>
         </a:xfrm>
       </p:grpSpPr>
-      <p:pic>
-        <p:nvPicPr>
-          <p:cNvPr id="4" name="Picture 3">
-            <a:extLst>
-              <a:ext uri="{FF2B5EF4-FFF2-40B4-BE49-F238E27FC236}">
-                <a16:creationId xmlns:a16="http://schemas.microsoft.com/office/drawing/2014/main" id="{E4E3D8A8-B7AF-889B-FBBC-6EAED35D7BF8}"/>
-              </a:ext>
-            </a:extLst>
-          </p:cNvPr>
-          <p:cNvPicPr>
-            <a:picLocks noChangeAspect="1"/>
-          </p:cNvPicPr>
-          <p:nvPr/>
-        </p:nvPicPr>
-        <p:blipFill>
-          <a:blip r:embed="rId2"/>
-          <a:stretch>
-            <a:fillRect/>
-          </a:stretch>
-        </p:blipFill>
-        <p:spPr>
-          <a:xfrm>
-            <a:off x="1499616" y="232510"/>
-            <a:ext cx="6749287" cy="5595735"/>
-          </a:xfrm>
-          <a:prstGeom prst="rect">
-            <a:avLst/>
-          </a:prstGeom>
-        </p:spPr>
-      </p:pic>
-      <p:pic>
-        <p:nvPicPr>
-          <p:cNvPr id="6" name="Picture 5">
-            <a:extLst>
-              <a:ext uri="{FF2B5EF4-FFF2-40B4-BE49-F238E27FC236}">
-                <a16:creationId xmlns:a16="http://schemas.microsoft.com/office/drawing/2014/main" id="{F949484A-AA2F-DA4C-63EF-FC331EEE3F23}"/>
-              </a:ext>
-            </a:extLst>
-          </p:cNvPr>
-          <p:cNvPicPr>
-            <a:picLocks noChangeAspect="1"/>
-          </p:cNvPicPr>
-          <p:nvPr/>
-        </p:nvPicPr>
-        <p:blipFill>
-          <a:blip r:embed="rId3"/>
-          <a:stretch>
-            <a:fillRect/>
-          </a:stretch>
-        </p:blipFill>
-        <p:spPr>
-          <a:xfrm>
-            <a:off x="1622946" y="5916168"/>
-            <a:ext cx="3774613" cy="898176"/>
-          </a:xfrm>
-          <a:prstGeom prst="rect">
-            <a:avLst/>
-          </a:prstGeom>
-        </p:spPr>
-      </p:pic>
-      <p:sp>
-        <p:nvSpPr>
-          <p:cNvPr id="5" name="TextBox 4">
-            <a:extLst>
-              <a:ext uri="{FF2B5EF4-FFF2-40B4-BE49-F238E27FC236}">
-                <a16:creationId xmlns:a16="http://schemas.microsoft.com/office/drawing/2014/main" id="{C5AFC780-F7E6-8C56-EE35-13D751B9942C}"/>
-              </a:ext>
-            </a:extLst>
-          </p:cNvPr>
-          <p:cNvSpPr txBox="1"/>
-          <p:nvPr/>
-        </p:nvSpPr>
-        <p:spPr>
-          <a:xfrm>
-            <a:off x="221488" y="43656"/>
-            <a:ext cx="2000504" cy="461665"/>
-          </a:xfrm>
-          <a:prstGeom prst="rect">
-            <a:avLst/>
-          </a:prstGeom>
-          <a:noFill/>
-        </p:spPr>
-        <p:txBody>
-          <a:bodyPr wrap="square">
-            <a:spAutoFit/>
-          </a:bodyPr>
-          <a:lstStyle/>
-          <a:p>
-            <a:r>
-              <a:rPr lang="en-US" sz="2400" b="1" dirty="0">
-                <a:solidFill>
-                  <a:schemeClr val="accent6">
-                    <a:lumMod val="60000"/>
-                    <a:lumOff val="40000"/>
-                  </a:schemeClr>
-                </a:solidFill>
-              </a:rPr>
-              <a:t>Code</a:t>
-            </a:r>
-            <a:endParaRPr lang="en-US" sz="2400" dirty="0">
-              <a:solidFill>
-                <a:schemeClr val="accent6">
-                  <a:lumMod val="60000"/>
-                  <a:lumOff val="40000"/>
-                </a:schemeClr>
-              </a:solidFill>
-            </a:endParaRPr>
-          </a:p>
-        </p:txBody>
-      </p:sp>
     </p:spTree>
     <p:extLst>
       <p:ext uri="{BB962C8B-B14F-4D97-AF65-F5344CB8AC3E}">
-        <p14:creationId xmlns:p14="http://schemas.microsoft.com/office/powerpoint/2010/main" val="2027249983"/>
+        <p14:creationId xmlns:p14="http://schemas.microsoft.com/office/powerpoint/2010/main" val="366625378"/>
       </p:ext>
     </p:extLst>
   </p:cSld>

--- a/AgenticAI/5-Tools-and-Framework-RAG/Langchain-1-basics-AI-Agent-Calculator-Weather/Langchain-2-Setup-Installation-CodeExplanation.pptx
+++ b/AgenticAI/5-Tools-and-Framework-RAG/Langchain-1-basics-AI-Agent-Calculator-Weather/Langchain-2-Setup-Installation-CodeExplanation.pptx
@@ -223,7 +223,7 @@
           <a:p>
             <a:fld id="{7BAEECA8-D063-486F-AE31-5020270C1449}" type="datetimeFigureOut">
               <a:rPr lang="en-US" smtClean="0"/>
-              <a:t>9/5/2026</a:t>
+              <a:t>9/10/2026</a:t>
             </a:fld>
             <a:endParaRPr lang="en-US"/>
           </a:p>
@@ -400,7 +400,7 @@
           <a:p>
             <a:fld id="{CB233BD1-3BA8-448D-9D08-7846095EA517}" type="datetimeFigureOut">
               <a:rPr lang="en-US" smtClean="0"/>
-              <a:t>9/5/2026</a:t>
+              <a:t>9/10/2026</a:t>
             </a:fld>
             <a:endParaRPr lang="en-US"/>
           </a:p>
@@ -814,7 +814,7 @@
           <a:p>
             <a:fld id="{6383FAE1-13DE-4511-8C1B-C8AFB720664C}" type="datetimeFigureOut">
               <a:rPr lang="en-US" smtClean="0"/>
-              <a:t>9/5/2026</a:t>
+              <a:t>9/10/2026</a:t>
             </a:fld>
             <a:endParaRPr lang="en-US"/>
           </a:p>
@@ -1012,7 +1012,7 @@
           <a:p>
             <a:fld id="{6383FAE1-13DE-4511-8C1B-C8AFB720664C}" type="datetimeFigureOut">
               <a:rPr lang="en-US" smtClean="0"/>
-              <a:t>9/5/2026</a:t>
+              <a:t>9/10/2026</a:t>
             </a:fld>
             <a:endParaRPr lang="en-US"/>
           </a:p>
@@ -1220,7 +1220,7 @@
           <a:p>
             <a:fld id="{6383FAE1-13DE-4511-8C1B-C8AFB720664C}" type="datetimeFigureOut">
               <a:rPr lang="en-US" smtClean="0"/>
-              <a:t>9/5/2026</a:t>
+              <a:t>9/10/2026</a:t>
             </a:fld>
             <a:endParaRPr lang="en-US"/>
           </a:p>
@@ -1418,7 +1418,7 @@
           <a:p>
             <a:fld id="{6383FAE1-13DE-4511-8C1B-C8AFB720664C}" type="datetimeFigureOut">
               <a:rPr lang="en-US" smtClean="0"/>
-              <a:t>9/5/2026</a:t>
+              <a:t>9/10/2026</a:t>
             </a:fld>
             <a:endParaRPr lang="en-US"/>
           </a:p>
@@ -1693,7 +1693,7 @@
           <a:p>
             <a:fld id="{6383FAE1-13DE-4511-8C1B-C8AFB720664C}" type="datetimeFigureOut">
               <a:rPr lang="en-US" smtClean="0"/>
-              <a:t>9/5/2026</a:t>
+              <a:t>9/10/2026</a:t>
             </a:fld>
             <a:endParaRPr lang="en-US"/>
           </a:p>
@@ -1958,7 +1958,7 @@
           <a:p>
             <a:fld id="{6383FAE1-13DE-4511-8C1B-C8AFB720664C}" type="datetimeFigureOut">
               <a:rPr lang="en-US" smtClean="0"/>
-              <a:t>9/5/2026</a:t>
+              <a:t>9/10/2026</a:t>
             </a:fld>
             <a:endParaRPr lang="en-US"/>
           </a:p>
@@ -2370,7 +2370,7 @@
           <a:p>
             <a:fld id="{6383FAE1-13DE-4511-8C1B-C8AFB720664C}" type="datetimeFigureOut">
               <a:rPr lang="en-US" smtClean="0"/>
-              <a:t>9/5/2026</a:t>
+              <a:t>9/10/2026</a:t>
             </a:fld>
             <a:endParaRPr lang="en-US"/>
           </a:p>
@@ -2511,7 +2511,7 @@
           <a:p>
             <a:fld id="{6383FAE1-13DE-4511-8C1B-C8AFB720664C}" type="datetimeFigureOut">
               <a:rPr lang="en-US" smtClean="0"/>
-              <a:t>9/5/2026</a:t>
+              <a:t>9/10/2026</a:t>
             </a:fld>
             <a:endParaRPr lang="en-US"/>
           </a:p>
@@ -2624,7 +2624,7 @@
           <a:p>
             <a:fld id="{6383FAE1-13DE-4511-8C1B-C8AFB720664C}" type="datetimeFigureOut">
               <a:rPr lang="en-US" smtClean="0"/>
-              <a:t>9/5/2026</a:t>
+              <a:t>9/10/2026</a:t>
             </a:fld>
             <a:endParaRPr lang="en-US"/>
           </a:p>
@@ -2935,7 +2935,7 @@
           <a:p>
             <a:fld id="{6383FAE1-13DE-4511-8C1B-C8AFB720664C}" type="datetimeFigureOut">
               <a:rPr lang="en-US" smtClean="0"/>
-              <a:t>9/5/2026</a:t>
+              <a:t>9/10/2026</a:t>
             </a:fld>
             <a:endParaRPr lang="en-US"/>
           </a:p>
@@ -3226,7 +3226,7 @@
           <a:p>
             <a:fld id="{6383FAE1-13DE-4511-8C1B-C8AFB720664C}" type="datetimeFigureOut">
               <a:rPr lang="en-US" smtClean="0"/>
-              <a:t>9/5/2026</a:t>
+              <a:t>9/10/2026</a:t>
             </a:fld>
             <a:endParaRPr lang="en-US"/>
           </a:p>
@@ -3470,7 +3470,7 @@
           <a:p>
             <a:fld id="{6383FAE1-13DE-4511-8C1B-C8AFB720664C}" type="datetimeFigureOut">
               <a:rPr lang="en-US" smtClean="0"/>
-              <a:t>9/5/2026</a:t>
+              <a:t>9/10/2026</a:t>
             </a:fld>
             <a:endParaRPr lang="en-US"/>
           </a:p>
@@ -4442,7 +4442,7 @@
         <p:spPr>
           <a:xfrm>
             <a:off x="246888" y="226536"/>
-            <a:ext cx="11631168" cy="4893647"/>
+            <a:ext cx="11631168" cy="7417415"/>
           </a:xfrm>
           <a:prstGeom prst="rect">
             <a:avLst/>
@@ -4495,8 +4495,10 @@
                   </a:schemeClr>
                 </a:solidFill>
               </a:rPr>
-              <a:t>## Work with python3.11. </a:t>
-            </a:r>
+              <a:t> Work with python3.11. </a:t>
+            </a:r>
+          </a:p>
+          <a:p>
             <a:br>
               <a:rPr lang="en-US" sz="2400" dirty="0">
                 <a:solidFill>
@@ -4516,7 +4518,7 @@
                   </a:schemeClr>
                 </a:solidFill>
               </a:rPr>
-              <a:t>### 1) Create virtual environment </a:t>
+              <a:t>1) Create virtual environment </a:t>
             </a:r>
             <a:r>
               <a:rPr lang="en-US" sz="2400" dirty="0">
@@ -4550,7 +4552,7 @@
             </a:endParaRPr>
           </a:p>
           <a:p>
-            <a:br>
+            <a:r>
               <a:rPr lang="en-US" sz="2400" dirty="0">
                 <a:solidFill>
                   <a:schemeClr val="accent6">
@@ -4559,7 +4561,10 @@
                   </a:schemeClr>
                 </a:solidFill>
               </a:rPr>
-            </a:br>
+              <a:t># List all python</a:t>
+            </a:r>
+          </a:p>
+          <a:p>
             <a:r>
               <a:rPr lang="en-US" sz="2400" dirty="0">
                 <a:solidFill>
@@ -4569,10 +4574,42 @@
                   </a:schemeClr>
                 </a:solidFill>
               </a:rPr>
-              <a:t>&gt; C:\Users\hi\AppData\Local\Programs\Python\Python311\python.exe -m </a:t>
-            </a:r>
-            <a:r>
-              <a:rPr lang="en-US" sz="2400" dirty="0" err="1">
+              <a:t>&gt; </a:t>
+            </a:r>
+            <a:r>
+              <a:rPr lang="en-US" sz="2800" dirty="0" err="1">
+                <a:solidFill>
+                  <a:schemeClr val="accent4">
+                    <a:lumMod val="60000"/>
+                    <a:lumOff val="40000"/>
+                  </a:schemeClr>
+                </a:solidFill>
+              </a:rPr>
+              <a:t>py</a:t>
+            </a:r>
+            <a:r>
+              <a:rPr lang="en-US" sz="2800" dirty="0">
+                <a:solidFill>
+                  <a:schemeClr val="accent4">
+                    <a:lumMod val="60000"/>
+                    <a:lumOff val="40000"/>
+                  </a:schemeClr>
+                </a:solidFill>
+              </a:rPr>
+              <a:t> --list-paths</a:t>
+            </a:r>
+            <a:endParaRPr lang="en-US" sz="2400" dirty="0">
+              <a:solidFill>
+                <a:schemeClr val="accent4">
+                  <a:lumMod val="60000"/>
+                  <a:lumOff val="40000"/>
+                </a:schemeClr>
+              </a:solidFill>
+            </a:endParaRPr>
+          </a:p>
+          <a:p>
+            <a:r>
+              <a:rPr lang="en-US" sz="2000" dirty="0">
                 <a:solidFill>
                   <a:schemeClr val="accent6">
                     <a:lumMod val="60000"/>
@@ -4580,10 +4617,12 @@
                   </a:schemeClr>
                 </a:solidFill>
               </a:rPr>
-              <a:t>venv</a:t>
-            </a:r>
-            <a:r>
-              <a:rPr lang="en-US" sz="2400" dirty="0">
+              <a:t>  *               C:\Users\ash32\Desktop\education\play_langchain_langgraph\.venv\Scripts\python.exe</a:t>
+            </a:r>
+          </a:p>
+          <a:p>
+            <a:r>
+              <a:rPr lang="en-US" sz="2000" dirty="0">
                 <a:solidFill>
                   <a:schemeClr val="accent6">
                     <a:lumMod val="60000"/>
@@ -4591,10 +4630,12 @@
                   </a:schemeClr>
                 </a:solidFill>
               </a:rPr>
-              <a:t> .</a:t>
-            </a:r>
-            <a:r>
-              <a:rPr lang="en-US" sz="2400" dirty="0" err="1">
+              <a:t> -V:3.14          C:\Users\ash32\AppData\Local\Python\pythoncore-3.14-64\python.exe</a:t>
+            </a:r>
+          </a:p>
+          <a:p>
+            <a:r>
+              <a:rPr lang="en-US" sz="2000" dirty="0">
                 <a:solidFill>
                   <a:schemeClr val="accent6">
                     <a:lumMod val="60000"/>
@@ -4602,8 +4643,10 @@
                   </a:schemeClr>
                 </a:solidFill>
               </a:rPr>
-              <a:t>venv</a:t>
-            </a:r>
+              <a:t> -V:3.11          C:\Users\ash32\AppData\Local\Programs\Python\Python311\python.exe</a:t>
+            </a:r>
+          </a:p>
+          <a:p>
             <a:endParaRPr lang="en-US" sz="2400" dirty="0">
               <a:solidFill>
                 <a:schemeClr val="accent6">
@@ -4614,6 +4657,81 @@
             </a:endParaRPr>
           </a:p>
           <a:p>
+            <a:br>
+              <a:rPr lang="en-US" sz="2400" dirty="0">
+                <a:solidFill>
+                  <a:schemeClr val="accent6">
+                    <a:lumMod val="60000"/>
+                    <a:lumOff val="40000"/>
+                  </a:schemeClr>
+                </a:solidFill>
+              </a:rPr>
+            </a:br>
+            <a:r>
+              <a:rPr lang="en-US" sz="2000" dirty="0">
+                <a:solidFill>
+                  <a:schemeClr val="accent6">
+                    <a:lumMod val="60000"/>
+                    <a:lumOff val="40000"/>
+                  </a:schemeClr>
+                </a:solidFill>
+              </a:rPr>
+              <a:t>&gt; </a:t>
+            </a:r>
+            <a:r>
+              <a:rPr lang="en-US" sz="2400" dirty="0">
+                <a:solidFill>
+                  <a:schemeClr val="accent4">
+                    <a:lumMod val="60000"/>
+                    <a:lumOff val="40000"/>
+                  </a:schemeClr>
+                </a:solidFill>
+              </a:rPr>
+              <a:t>C:\Users\ash32\AppData\Local\Programs\Python\Python311\python.exe -m </a:t>
+            </a:r>
+            <a:r>
+              <a:rPr lang="en-US" sz="2400" dirty="0" err="1">
+                <a:solidFill>
+                  <a:schemeClr val="accent4">
+                    <a:lumMod val="60000"/>
+                    <a:lumOff val="40000"/>
+                  </a:schemeClr>
+                </a:solidFill>
+              </a:rPr>
+              <a:t>venv</a:t>
+            </a:r>
+            <a:r>
+              <a:rPr lang="en-US" sz="2400" dirty="0">
+                <a:solidFill>
+                  <a:schemeClr val="accent4">
+                    <a:lumMod val="60000"/>
+                    <a:lumOff val="40000"/>
+                  </a:schemeClr>
+                </a:solidFill>
+              </a:rPr>
+              <a:t> .</a:t>
+            </a:r>
+            <a:r>
+              <a:rPr lang="en-US" sz="2400" dirty="0" err="1">
+                <a:solidFill>
+                  <a:schemeClr val="accent4">
+                    <a:lumMod val="60000"/>
+                    <a:lumOff val="40000"/>
+                  </a:schemeClr>
+                </a:solidFill>
+              </a:rPr>
+              <a:t>venv</a:t>
+            </a:r>
+            <a:endParaRPr lang="en-US" sz="2400" dirty="0">
+              <a:solidFill>
+                <a:schemeClr val="accent4">
+                  <a:lumMod val="60000"/>
+                  <a:lumOff val="40000"/>
+                </a:schemeClr>
+              </a:solidFill>
+            </a:endParaRPr>
+          </a:p>
+          <a:p>
             <a:endParaRPr lang="en-US" sz="2400" dirty="0">
               <a:solidFill>
                 <a:schemeClr val="accent6">
@@ -4643,7 +4761,7 @@
                   </a:schemeClr>
                 </a:solidFill>
               </a:rPr>
-              <a:t>### 2) Activate virtual environment</a:t>
+              <a:t>2) Activate virtual environment</a:t>
             </a:r>
             <a:endParaRPr lang="en-US" sz="2400" dirty="0">
               <a:solidFill>
@@ -4666,7 +4784,7 @@
           </a:p>
           <a:p>
             <a:r>
-              <a:rPr lang="en-US" sz="2400" dirty="0">
+              <a:rPr lang="en-US" sz="2000" dirty="0">
                 <a:solidFill>
                   <a:schemeClr val="accent6">
                     <a:lumMod val="60000"/>
@@ -4674,12 +4792,23 @@
                   </a:schemeClr>
                 </a:solidFill>
               </a:rPr>
-              <a:t>&gt; .</a:t>
-            </a:r>
-            <a:r>
-              <a:rPr lang="en-US" sz="2400" dirty="0" err="1">
-                <a:solidFill>
-                  <a:schemeClr val="accent6">
+              <a:t>&gt; </a:t>
+            </a:r>
+            <a:r>
+              <a:rPr lang="en-US" sz="2800" dirty="0">
+                <a:solidFill>
+                  <a:schemeClr val="accent4">
+                    <a:lumMod val="60000"/>
+                    <a:lumOff val="40000"/>
+                  </a:schemeClr>
+                </a:solidFill>
+              </a:rPr>
+              <a:t>.</a:t>
+            </a:r>
+            <a:r>
+              <a:rPr lang="en-US" sz="2800" dirty="0" err="1">
+                <a:solidFill>
+                  <a:schemeClr val="accent4">
                     <a:lumMod val="60000"/>
                     <a:lumOff val="40000"/>
                   </a:schemeClr>
@@ -4688,15 +4817,15 @@
               <a:t>venv</a:t>
             </a:r>
             <a:r>
-              <a:rPr lang="en-US" sz="2400" dirty="0">
-                <a:solidFill>
-                  <a:schemeClr val="accent6">
-                    <a:lumMod val="60000"/>
-                    <a:lumOff val="40000"/>
-                  </a:schemeClr>
-                </a:solidFill>
-              </a:rPr>
-              <a:t>\Scripts\Activate.ps1</a:t>
+              <a:rPr lang="en-US" sz="2800" dirty="0">
+                <a:solidFill>
+                  <a:schemeClr val="accent4">
+                    <a:lumMod val="60000"/>
+                    <a:lumOff val="40000"/>
+                  </a:schemeClr>
+                </a:solidFill>
+              </a:rPr>
+              <a:t>\Scripts\Activate</a:t>
             </a:r>
           </a:p>
           <a:p>
@@ -4772,7 +4901,7 @@
         <p:spPr>
           <a:xfrm>
             <a:off x="477520" y="226536"/>
-            <a:ext cx="10292080" cy="3416320"/>
+            <a:ext cx="10292080" cy="3539430"/>
           </a:xfrm>
           <a:prstGeom prst="rect">
             <a:avLst/>
@@ -4825,7 +4954,7 @@
                   </a:schemeClr>
                 </a:solidFill>
               </a:rPr>
-              <a:t>### 3) Install </a:t>
+              <a:t>3) Install </a:t>
             </a:r>
             <a:r>
               <a:rPr lang="en-US" sz="2400" b="1" dirty="0" err="1">
@@ -4900,10 +5029,42 @@
                   </a:schemeClr>
                 </a:solidFill>
               </a:rPr>
-              <a:t>&gt; python -m pip install </a:t>
-            </a:r>
-            <a:r>
-              <a:rPr lang="en-US" sz="2400" dirty="0" err="1">
+              <a:t>&gt; </a:t>
+            </a:r>
+            <a:r>
+              <a:rPr lang="en-US" sz="2800" dirty="0">
+                <a:solidFill>
+                  <a:schemeClr val="accent4">
+                    <a:lumMod val="60000"/>
+                    <a:lumOff val="40000"/>
+                  </a:schemeClr>
+                </a:solidFill>
+              </a:rPr>
+              <a:t>python -m pip install </a:t>
+            </a:r>
+            <a:r>
+              <a:rPr lang="en-US" sz="2800" dirty="0" err="1">
+                <a:solidFill>
+                  <a:schemeClr val="accent4">
+                    <a:lumMod val="60000"/>
+                    <a:lumOff val="40000"/>
+                  </a:schemeClr>
+                </a:solidFill>
+              </a:rPr>
+              <a:t>jupyter</a:t>
+            </a:r>
+            <a:endParaRPr lang="en-US" sz="2400" dirty="0">
+              <a:solidFill>
+                <a:schemeClr val="accent4">
+                  <a:lumMod val="60000"/>
+                  <a:lumOff val="40000"/>
+                </a:schemeClr>
+              </a:solidFill>
+            </a:endParaRPr>
+          </a:p>
+          <a:p>
+            <a:br>
+              <a:rPr lang="en-US" sz="2400" dirty="0">
                 <a:solidFill>
                   <a:schemeClr val="accent6">
                     <a:lumMod val="60000"/>
@@ -4911,7 +5072,39 @@
                   </a:schemeClr>
                 </a:solidFill>
               </a:rPr>
+            </a:br>
+            <a:r>
+              <a:rPr lang="en-US" sz="2400" b="1" dirty="0">
+                <a:solidFill>
+                  <a:schemeClr val="accent6">
+                    <a:lumMod val="60000"/>
+                    <a:lumOff val="40000"/>
+                  </a:schemeClr>
+                </a:solidFill>
+              </a:rPr>
+              <a:t>4) Run </a:t>
+            </a:r>
+            <a:r>
+              <a:rPr lang="en-US" sz="2400" b="1" dirty="0" err="1">
+                <a:solidFill>
+                  <a:schemeClr val="accent6">
+                    <a:lumMod val="60000"/>
+                    <a:lumOff val="40000"/>
+                  </a:schemeClr>
+                </a:solidFill>
+              </a:rPr>
               <a:t>jupyter</a:t>
+            </a:r>
+            <a:r>
+              <a:rPr lang="en-US" sz="2400" b="1" dirty="0">
+                <a:solidFill>
+                  <a:schemeClr val="accent6">
+                    <a:lumMod val="60000"/>
+                    <a:lumOff val="40000"/>
+                  </a:schemeClr>
+                </a:solidFill>
+              </a:rPr>
+              <a:t>:</a:t>
             </a:r>
             <a:endParaRPr lang="en-US" sz="2400" dirty="0">
               <a:solidFill>
@@ -4934,7 +5127,7 @@
               </a:rPr>
             </a:br>
             <a:r>
-              <a:rPr lang="en-US" sz="2400" b="1" dirty="0">
+              <a:rPr lang="en-US" sz="2400" dirty="0">
                 <a:solidFill>
                   <a:schemeClr val="accent6">
                     <a:lumMod val="60000"/>
@@ -4942,12 +5135,23 @@
                   </a:schemeClr>
                 </a:solidFill>
               </a:rPr>
-              <a:t>### 4) Run </a:t>
-            </a:r>
-            <a:r>
-              <a:rPr lang="en-US" sz="2400" b="1" dirty="0" err="1">
-                <a:solidFill>
-                  <a:schemeClr val="accent6">
+              <a:t>&gt; </a:t>
+            </a:r>
+            <a:r>
+              <a:rPr lang="en-US" sz="2800" dirty="0">
+                <a:solidFill>
+                  <a:schemeClr val="accent4">
+                    <a:lumMod val="60000"/>
+                    <a:lumOff val="40000"/>
+                  </a:schemeClr>
+                </a:solidFill>
+              </a:rPr>
+              <a:t>python -m </a:t>
+            </a:r>
+            <a:r>
+              <a:rPr lang="en-US" sz="2800" dirty="0" err="1">
+                <a:solidFill>
+                  <a:schemeClr val="accent4">
                     <a:lumMod val="60000"/>
                     <a:lumOff val="40000"/>
                   </a:schemeClr>
@@ -4956,62 +5160,9 @@
               <a:t>jupyter</a:t>
             </a:r>
             <a:r>
-              <a:rPr lang="en-US" sz="2400" b="1" dirty="0">
-                <a:solidFill>
-                  <a:schemeClr val="accent6">
-                    <a:lumMod val="60000"/>
-                    <a:lumOff val="40000"/>
-                  </a:schemeClr>
-                </a:solidFill>
-              </a:rPr>
-              <a:t>:</a:t>
-            </a:r>
-            <a:endParaRPr lang="en-US" sz="2400" dirty="0">
-              <a:solidFill>
-                <a:schemeClr val="accent6">
-                  <a:lumMod val="60000"/>
-                  <a:lumOff val="40000"/>
-                </a:schemeClr>
-              </a:solidFill>
-            </a:endParaRPr>
-          </a:p>
-          <a:p>
-            <a:br>
-              <a:rPr lang="en-US" sz="2400" dirty="0">
-                <a:solidFill>
-                  <a:schemeClr val="accent6">
-                    <a:lumMod val="60000"/>
-                    <a:lumOff val="40000"/>
-                  </a:schemeClr>
-                </a:solidFill>
-              </a:rPr>
-            </a:br>
-            <a:r>
-              <a:rPr lang="en-US" sz="2400" dirty="0">
-                <a:solidFill>
-                  <a:schemeClr val="accent6">
-                    <a:lumMod val="60000"/>
-                    <a:lumOff val="40000"/>
-                  </a:schemeClr>
-                </a:solidFill>
-              </a:rPr>
-              <a:t>&gt; python -m </a:t>
-            </a:r>
-            <a:r>
-              <a:rPr lang="en-US" sz="2400" dirty="0" err="1">
-                <a:solidFill>
-                  <a:schemeClr val="accent6">
-                    <a:lumMod val="60000"/>
-                    <a:lumOff val="40000"/>
-                  </a:schemeClr>
-                </a:solidFill>
-              </a:rPr>
-              <a:t>jupyter</a:t>
-            </a:r>
-            <a:r>
-              <a:rPr lang="en-US" sz="2400" dirty="0">
-                <a:solidFill>
-                  <a:schemeClr val="accent6">
+              <a:rPr lang="en-US" sz="2800" dirty="0">
+                <a:solidFill>
+                  <a:schemeClr val="accent4">
                     <a:lumMod val="60000"/>
                     <a:lumOff val="40000"/>
                   </a:schemeClr>
@@ -5126,7 +5277,7 @@
                   </a:schemeClr>
                 </a:solidFill>
               </a:rPr>
-              <a:t>### 5) Install following packages located in  requirements.txt</a:t>
+              <a:t>5) Install following packages located in  requirements.txt</a:t>
             </a:r>
             <a:endParaRPr lang="en-US" sz="2400" dirty="0">
               <a:solidFill>
@@ -5189,8 +5340,8 @@
         </p:nvSpPr>
         <p:spPr>
           <a:xfrm>
-            <a:off x="1984248" y="1314672"/>
-            <a:ext cx="7790688" cy="830997"/>
+            <a:off x="1759138" y="2681356"/>
+            <a:ext cx="8673723" cy="954107"/>
           </a:xfrm>
           <a:prstGeom prst="rect">
             <a:avLst/>
@@ -5204,7 +5355,7 @@
           <a:lstStyle/>
           <a:p>
             <a:r>
-              <a:rPr lang="en-US" sz="2400" b="1" dirty="0">
+              <a:rPr lang="en-US" sz="2800" b="1" dirty="0">
                 <a:solidFill>
                   <a:schemeClr val="accent6">
                     <a:lumMod val="60000"/>
@@ -5215,7 +5366,7 @@
               <a:t>Code: step1 - </a:t>
             </a:r>
             <a:r>
-              <a:rPr lang="en-US" sz="2400" dirty="0">
+              <a:rPr lang="en-US" sz="2800" dirty="0">
                 <a:solidFill>
                   <a:schemeClr val="accent6">
                     <a:lumMod val="60000"/>
@@ -5226,7 +5377,7 @@
               <a:t>Run </a:t>
             </a:r>
             <a:r>
-              <a:rPr lang="en-US" sz="2400" dirty="0" err="1">
+              <a:rPr lang="en-US" sz="2800" dirty="0" err="1">
                 <a:solidFill>
                   <a:schemeClr val="accent6">
                     <a:lumMod val="60000"/>
@@ -5237,7 +5388,7 @@
               <a:t>jupyter</a:t>
             </a:r>
             <a:r>
-              <a:rPr lang="en-US" sz="2400" dirty="0">
+              <a:rPr lang="en-US" sz="2800" dirty="0">
                 <a:solidFill>
                   <a:schemeClr val="accent6">
                     <a:lumMod val="60000"/>
@@ -5250,7 +5401,7 @@
           </a:p>
           <a:p>
             <a:r>
-              <a:rPr lang="en-US" sz="2400" dirty="0">
+              <a:rPr lang="en-US" sz="2800" dirty="0">
                 <a:solidFill>
                   <a:schemeClr val="accent6">
                     <a:lumMod val="60000"/>
@@ -5313,8 +5464,8 @@
         </p:nvSpPr>
         <p:spPr>
           <a:xfrm>
-            <a:off x="820928" y="1131792"/>
-            <a:ext cx="10550144" cy="461665"/>
+            <a:off x="3337986" y="2370656"/>
+            <a:ext cx="10550144" cy="523220"/>
           </a:xfrm>
           <a:prstGeom prst="rect">
             <a:avLst/>
@@ -5328,7 +5479,7 @@
           <a:lstStyle/>
           <a:p>
             <a:r>
-              <a:rPr lang="en-US" sz="2400" b="1" dirty="0">
+              <a:rPr lang="en-US" sz="2800" b="1" dirty="0">
                 <a:solidFill>
                   <a:schemeClr val="accent6">
                     <a:lumMod val="60000"/>
@@ -5339,7 +5490,7 @@
               <a:t>Code: step2 – Run </a:t>
             </a:r>
             <a:r>
-              <a:rPr lang="en-US" sz="2400" b="1" dirty="0" err="1">
+              <a:rPr lang="en-US" sz="2800" b="1" dirty="0" err="1">
                 <a:solidFill>
                   <a:schemeClr val="accent6">
                     <a:lumMod val="60000"/>
@@ -5350,7 +5501,7 @@
               <a:t>streamlit</a:t>
             </a:r>
             <a:r>
-              <a:rPr lang="en-US" sz="2400" b="1" dirty="0">
+              <a:rPr lang="en-US" sz="2800" b="1" dirty="0">
                 <a:solidFill>
                   <a:schemeClr val="accent6">
                     <a:lumMod val="60000"/>
@@ -5360,7 +5511,7 @@
               </a:rPr>
               <a:t> app</a:t>
             </a:r>
-            <a:endParaRPr lang="en-US" sz="2400" dirty="0">
+            <a:endParaRPr lang="en-US" sz="2800" dirty="0">
               <a:solidFill>
                 <a:schemeClr val="accent6">
                   <a:lumMod val="60000"/>
